--- a/app/presentation/un-campo-alla-volta.pptx
+++ b/app/presentation/un-campo-alla-volta.pptx
@@ -508,7 +508,7 @@
           <a:lstStyle/>
           <a:p>
             <a:r>
-              <a:t>0:00-0:15 — Titolo. Una frase: questo strumento non spiega il documento, lo porta a termine. Tre passi, nessuna registrazione.</a:t>
+              <a:t>0:00-0:15 — Titolo. Una frase sola: questo strumento non spiega il documento, lo porta a termine. Tre passi, nessuna registrazione.</a:t>
             </a:r>
           </a:p>
         </p:txBody>
@@ -578,7 +578,7 @@
           <a:lstStyle/>
           <a:p>
             <a:r>
-              <a:t>0:15-0:45 — Il problema non è la persona, è il linguaggio. Leggere ad alta voce l'etichetta reale: nessuno in sala sa cosa chiede. È un campo vero di un modulo comunale. Il risultato è sempre lo stesso: o chiede aiuto, o rinuncia.</a:t>
+              <a:t>0:15-0:45 — Il problema non è la persona, è il linguaggio. Leggere ad alta voce l'etichetta: nessuno in sala sa cosa chiede, ed è un campo vero di un modulo comunale. L'esito è sempre lo stesso: o chiede aiuto, o rinuncia.</a:t>
             </a:r>
           </a:p>
         </p:txBody>
@@ -718,7 +718,7 @@
           <a:lstStyle/>
           <a:p>
             <a:r>
-              <a:t>1:15-1:50 — Questa è la slide che conta. A sinistra il campo com'è scritto nel modulo, a destra quello che legge la persona. Il testo originale non sparisce mai: resta sotto, sempre visibile. Non stiamo riscrivendo il documento, stiamo facendo da ponte.</a:t>
+              <a:t>1:15-1:50 — La slide che conta. A sinistra il campo com'è scritto nel modulo, a destra quello che legge la persona. Il testo originale non sparisce mai: resta sotto, sempre visibile. Non riscriviamo il documento, facciamo da ponte.</a:t>
             </a:r>
           </a:p>
         </p:txBody>
@@ -858,7 +858,7 @@
           <a:lstStyle/>
           <a:p>
             <a:r>
-              <a:t>2:15-2:40 — Stack volutamente ordinario e noioso: Angular davanti, Spring Boot dietro, PDFBox per il PDF. L'unico pezzo interessante è il motore linguistico, ed è locale. Il flusso è lineare: nessuna coda, nessun database, nessuno stato da gestire oltre la sessione.</a:t>
+              <a:t>2:15-2:40 — Stack volutamente ordinario: Angular davanti, Spring Boot dietro, PDFBox per il PDF. L'unico pezzo interessante è il motore linguistico, ed è locale. Flusso lineare: nessuna coda, nessun database, nessuno stato oltre la sessione.</a:t>
             </a:r>
           </a:p>
         </p:txBody>
@@ -928,7 +928,7 @@
           <a:lstStyle/>
           <a:p>
             <a:r>
-              <a:t>2:40-3:00 — Chiusura sul punto che vende davvero: privacy per costruzione. I dati anagrafici non lasciano il computer perché il modello è locale, non perché qualcuno lo promette in un contratto. Nessun account, nessun abbonamento, e se il modello cade la persona arriva in fondo comunque. Chiudere qui.</a:t>
+              <a:t>2:40-3:00 — Chiusura sul punto che vende: privacy per costruzione. I dati anagrafici non lasciano il computer perché il modello è locale, non perché qualcuno lo promette in un contratto. Nessun account, nessun abbonamento, e se il modello cade la persona arriva in fondo comunque.</a:t>
             </a:r>
           </a:p>
         </p:txBody>
@@ -3949,7 +3949,7 @@
             <a:avLst/>
           </a:prstGeom>
           <a:solidFill>
-            <a:srgbClr val="FFFFFF"/>
+            <a:srgbClr val="000000"/>
           </a:solidFill>
           <a:ln>
             <a:noFill/>
@@ -3978,22 +3978,131 @@
           </a:p>
         </p:txBody>
       </p:sp>
-      <p:sp>
-        <p:nvSpPr>
-          <p:cNvPr id="3" name="Rectangle 2"/>
+      <p:pic>
+        <p:nvPicPr>
+          <p:cNvPr id="3" name="Picture 2" descr="accenture-greater-than.png"/>
+          <p:cNvPicPr>
+            <a:picLocks noChangeAspect="1"/>
+          </p:cNvPicPr>
+          <p:nvPr/>
+        </p:nvPicPr>
+        <p:blipFill>
+          <a:blip r:embed="rId2"/>
+          <a:stretch>
+            <a:fillRect/>
+          </a:stretch>
+        </p:blipFill>
+        <p:spPr>
+          <a:xfrm>
+            <a:off x="868680" y="1417320"/>
+            <a:ext cx="650363" cy="713232"/>
+          </a:xfrm>
+          <a:prstGeom prst="rect">
+            <a:avLst/>
+          </a:prstGeom>
+        </p:spPr>
+      </p:pic>
+      <p:sp>
+        <p:nvSpPr>
+          <p:cNvPr id="4" name="TextBox 3"/>
+          <p:cNvSpPr txBox="1"/>
+          <p:nvPr/>
+        </p:nvSpPr>
+        <p:spPr>
+          <a:xfrm>
+            <a:off x="868680" y="2468880"/>
+            <a:ext cx="10058400" cy="1371600"/>
+          </a:xfrm>
+          <a:prstGeom prst="rect">
+            <a:avLst/>
+          </a:prstGeom>
+          <a:noFill/>
+        </p:spPr>
+        <p:txBody>
+          <a:bodyPr wrap="square" anchor="t" lIns="0" rIns="0" tIns="0" bIns="0">
+            <a:spAutoFit/>
+          </a:bodyPr>
+          <a:lstStyle/>
+          <a:p>
+            <a:pPr algn="l">
+              <a:lnSpc>
+                <a:spcPct val="100000"/>
+              </a:lnSpc>
+              <a:spcAft>
+                <a:spcPts val="0"/>
+              </a:spcAft>
+            </a:pPr>
+            <a:r>
+              <a:rPr sz="6200" b="1" i="0">
+                <a:solidFill>
+                  <a:srgbClr val="FFFFFF"/>
+                </a:solidFill>
+                <a:latin typeface="Graphik"/>
+              </a:rPr>
+              <a:t>Un campo alla volta</a:t>
+            </a:r>
+          </a:p>
+        </p:txBody>
+      </p:sp>
+      <p:sp>
+        <p:nvSpPr>
+          <p:cNvPr id="5" name="TextBox 4"/>
+          <p:cNvSpPr txBox="1"/>
+          <p:nvPr/>
+        </p:nvSpPr>
+        <p:spPr>
+          <a:xfrm>
+            <a:off x="868680" y="3703320"/>
+            <a:ext cx="8595360" cy="1005840"/>
+          </a:xfrm>
+          <a:prstGeom prst="rect">
+            <a:avLst/>
+          </a:prstGeom>
+          <a:noFill/>
+        </p:spPr>
+        <p:txBody>
+          <a:bodyPr wrap="square" anchor="t" lIns="0" rIns="0" tIns="0" bIns="0">
+            <a:spAutoFit/>
+          </a:bodyPr>
+          <a:lstStyle/>
+          <a:p>
+            <a:pPr algn="l">
+              <a:lnSpc>
+                <a:spcPct val="130000"/>
+              </a:lnSpc>
+              <a:spcAft>
+                <a:spcPts val="0"/>
+              </a:spcAft>
+            </a:pPr>
+            <a:r>
+              <a:rPr sz="2300" b="0" i="0">
+                <a:solidFill>
+                  <a:srgbClr val="E6E6DC"/>
+                </a:solidFill>
+                <a:latin typeface="Graphik"/>
+              </a:rPr>
+              <a:t>Chi non capisce il linguaggio burocratico
+compila il modulo da solo, fino in fondo.</a:t>
+            </a:r>
+          </a:p>
+        </p:txBody>
+      </p:sp>
+      <p:sp>
+        <p:nvSpPr>
+          <p:cNvPr id="6" name="Rectangle 5"/>
           <p:cNvSpPr/>
           <p:nvPr/>
         </p:nvSpPr>
         <p:spPr>
           <a:xfrm>
-            <a:off x="0" y="0"/>
-            <a:ext cx="256032" cy="6858000"/>
+            <a:off x="868680" y="5120640"/>
+            <a:ext cx="1371600" cy="38100"/>
           </a:xfrm>
           <a:prstGeom prst="rect">
             <a:avLst/>
           </a:prstGeom>
           <a:solidFill>
-            <a:srgbClr val="004A8F"/>
+            <a:srgbClr val="A100FF"/>
           </a:solidFill>
           <a:ln>
             <a:noFill/>
@@ -4024,14 +4133,14 @@
       </p:sp>
       <p:sp>
         <p:nvSpPr>
-          <p:cNvPr id="4" name="TextBox 3"/>
+          <p:cNvPr id="7" name="TextBox 6"/>
           <p:cNvSpPr txBox="1"/>
           <p:nvPr/>
         </p:nvSpPr>
         <p:spPr>
           <a:xfrm>
-            <a:off x="1005840" y="2148840"/>
-            <a:ext cx="9601200" cy="1280160"/>
+            <a:off x="868680" y="5440680"/>
+            <a:ext cx="10058400" cy="457200"/>
           </a:xfrm>
           <a:prstGeom prst="rect">
             <a:avLst/>
@@ -4048,159 +4157,46 @@
               <a:lnSpc>
                 <a:spcPct val="100000"/>
               </a:lnSpc>
-              <a:spcBef>
-                <a:spcPts val="0"/>
-              </a:spcBef>
               <a:spcAft>
                 <a:spcPts val="0"/>
               </a:spcAft>
             </a:pPr>
             <a:r>
-              <a:rPr sz="6000" b="1" i="0">
+              <a:rPr sz="1450" b="1" i="0">
                 <a:solidFill>
-                  <a:srgbClr val="141416"/>
+                  <a:srgbClr val="BE82FF"/>
                 </a:solidFill>
-                <a:latin typeface="Helvetica Neue"/>
+                <a:latin typeface="Graphik"/>
               </a:rPr>
-              <a:t>Un campo alla volta</a:t>
-            </a:r>
-          </a:p>
-        </p:txBody>
-      </p:sp>
-      <p:sp>
-        <p:nvSpPr>
-          <p:cNvPr id="5" name="TextBox 4"/>
-          <p:cNvSpPr txBox="1"/>
-          <p:nvPr/>
-        </p:nvSpPr>
-        <p:spPr>
-          <a:xfrm>
-            <a:off x="1005840" y="3291840"/>
-            <a:ext cx="8778240" cy="1097280"/>
-          </a:xfrm>
-          <a:prstGeom prst="rect">
-            <a:avLst/>
-          </a:prstGeom>
-          <a:noFill/>
-        </p:spPr>
-        <p:txBody>
-          <a:bodyPr wrap="square" anchor="t" lIns="0" rIns="0" tIns="0" bIns="0">
-            <a:spAutoFit/>
-          </a:bodyPr>
-          <a:lstStyle/>
-          <a:p>
-            <a:pPr algn="l">
-              <a:lnSpc>
-                <a:spcPct val="125000"/>
-              </a:lnSpc>
-              <a:spcBef>
-                <a:spcPts val="0"/>
-              </a:spcBef>
-              <a:spcAft>
-                <a:spcPts val="0"/>
-              </a:spcAft>
-            </a:pPr>
-            <a:r>
-              <a:rPr sz="2400" b="0" i="0">
-                <a:solidFill>
-                  <a:srgbClr val="5A5F66"/>
-                </a:solidFill>
-                <a:latin typeface="Helvetica Neue"/>
-              </a:rPr>
-              <a:t>Chi non capisce il linguaggio burocratico compila il modulo da solo, fino in fondo.</a:t>
-            </a:r>
-          </a:p>
-        </p:txBody>
-      </p:sp>
-      <p:sp>
-        <p:nvSpPr>
-          <p:cNvPr id="6" name="Rectangle 5"/>
-          <p:cNvSpPr/>
-          <p:nvPr/>
-        </p:nvSpPr>
-        <p:spPr>
-          <a:xfrm>
-            <a:off x="1005840" y="4617720"/>
-            <a:ext cx="1463040" cy="38100"/>
-          </a:xfrm>
-          <a:prstGeom prst="rect">
-            <a:avLst/>
-          </a:prstGeom>
-          <a:solidFill>
-            <a:srgbClr val="004A8F"/>
-          </a:solidFill>
-          <a:ln>
-            <a:noFill/>
-          </a:ln>
-          <a:effectLst/>
-        </p:spPr>
-        <p:style>
-          <a:lnRef idx="1">
-            <a:schemeClr val="accent1"/>
-          </a:lnRef>
-          <a:fillRef idx="3">
-            <a:schemeClr val="accent1"/>
-          </a:fillRef>
-          <a:effectRef idx="2">
-            <a:schemeClr val="accent1"/>
-          </a:effectRef>
-          <a:fontRef idx="minor">
-            <a:schemeClr val="lt1"/>
-          </a:fontRef>
-        </p:style>
-        <p:txBody>
-          <a:bodyPr rtlCol="0" anchor="ctr"/>
-          <a:lstStyle/>
-          <a:p>
-            <a:pPr algn="ctr"/>
-          </a:p>
-        </p:txBody>
-      </p:sp>
-      <p:sp>
-        <p:nvSpPr>
-          <p:cNvPr id="7" name="TextBox 6"/>
-          <p:cNvSpPr txBox="1"/>
-          <p:nvPr/>
-        </p:nvSpPr>
-        <p:spPr>
-          <a:xfrm>
-            <a:off x="1005840" y="4983480"/>
-            <a:ext cx="9144000" cy="548640"/>
-          </a:xfrm>
-          <a:prstGeom prst="rect">
-            <a:avLst/>
-          </a:prstGeom>
-          <a:noFill/>
-        </p:spPr>
-        <p:txBody>
-          <a:bodyPr wrap="square" anchor="t" lIns="0" rIns="0" tIns="0" bIns="0">
-            <a:spAutoFit/>
-          </a:bodyPr>
-          <a:lstStyle/>
-          <a:p>
-            <a:pPr algn="l">
-              <a:lnSpc>
-                <a:spcPct val="100000"/>
-              </a:lnSpc>
-              <a:spcBef>
-                <a:spcPts val="0"/>
-              </a:spcBef>
-              <a:spcAft>
-                <a:spcPts val="0"/>
-              </a:spcAft>
-            </a:pPr>
-            <a:r>
-              <a:rPr sz="1500" b="1" i="0">
-                <a:solidFill>
-                  <a:srgbClr val="004A8F"/>
-                </a:solidFill>
-                <a:latin typeface="Helvetica Neue"/>
-              </a:rPr>
-              <a:t>Carica il PDF  ·  Rispondi a una domanda alla volta  ·  Scarica il modulo compilato</a:t>
-            </a:r>
-          </a:p>
-        </p:txBody>
-      </p:sp>
+              <a:t>Carica il PDF   ·   Rispondi a una domanda alla volta   ·   Scarica il modulo compilato</a:t>
+            </a:r>
+          </a:p>
+        </p:txBody>
+      </p:sp>
+      <p:pic>
+        <p:nvPicPr>
+          <p:cNvPr id="8" name="Picture 7" descr="accenture-technology-chiaro.png"/>
+          <p:cNvPicPr>
+            <a:picLocks noChangeAspect="1"/>
+          </p:cNvPicPr>
+          <p:nvPr/>
+        </p:nvPicPr>
+        <p:blipFill>
+          <a:blip r:embed="rId3"/>
+          <a:stretch>
+            <a:fillRect/>
+          </a:stretch>
+        </p:blipFill>
+        <p:spPr>
+          <a:xfrm>
+            <a:off x="9933127" y="6254782"/>
+            <a:ext cx="1600200" cy="146018"/>
+          </a:xfrm>
+          <a:prstGeom prst="rect">
+            <a:avLst/>
+          </a:prstGeom>
+        </p:spPr>
+      </p:pic>
     </p:spTree>
   </p:cSld>
   <p:clrMapOvr>
@@ -4234,7 +4230,7 @@
             <a:avLst/>
           </a:prstGeom>
           <a:solidFill>
-            <a:srgbClr val="F7F7F5"/>
+            <a:srgbClr val="FFFFFF"/>
           </a:solidFill>
           <a:ln>
             <a:noFill/>
@@ -4271,8 +4267,8 @@
         </p:nvSpPr>
         <p:spPr>
           <a:xfrm>
-            <a:off x="914400" y="777240"/>
-            <a:ext cx="8229600" cy="274320"/>
+            <a:off x="868680" y="749808"/>
+            <a:ext cx="8229600" cy="256032"/>
           </a:xfrm>
           <a:prstGeom prst="rect">
             <a:avLst/>
@@ -4289,19 +4285,16 @@
               <a:lnSpc>
                 <a:spcPct val="100000"/>
               </a:lnSpc>
-              <a:spcBef>
-                <a:spcPts val="0"/>
-              </a:spcBef>
               <a:spcAft>
                 <a:spcPts val="0"/>
               </a:spcAft>
             </a:pPr>
             <a:r>
-              <a:rPr sz="1200" b="1" i="0">
+              <a:rPr sz="1150" b="1" i="0">
                 <a:solidFill>
-                  <a:srgbClr val="004A8F"/>
+                  <a:srgbClr val="A100FF"/>
                 </a:solidFill>
-                <a:latin typeface="Helvetica Neue"/>
+                <a:latin typeface="Graphik"/>
               </a:rPr>
               <a:t>IL PROBLEMA</a:t>
             </a:r>
@@ -4316,8 +4309,8 @@
         </p:nvSpPr>
         <p:spPr>
           <a:xfrm>
-            <a:off x="914400" y="1143000"/>
-            <a:ext cx="10332720" cy="914400"/>
+            <a:off x="868680" y="1097280"/>
+            <a:ext cx="10469880" cy="914400"/>
           </a:xfrm>
           <a:prstGeom prst="rect">
             <a:avLst/>
@@ -4332,50 +4325,44 @@
           <a:p>
             <a:pPr algn="l">
               <a:lnSpc>
-                <a:spcPct val="100000"/>
+                <a:spcPct val="115000"/>
               </a:lnSpc>
-              <a:spcBef>
-                <a:spcPts val="0"/>
-              </a:spcBef>
               <a:spcAft>
                 <a:spcPts val="0"/>
               </a:spcAft>
             </a:pPr>
             <a:r>
-              <a:rPr sz="3400" b="1" i="0">
+              <a:rPr sz="3300" b="1" i="0">
                 <a:solidFill>
-                  <a:srgbClr val="141416"/>
+                  <a:srgbClr val="000000"/>
                 </a:solidFill>
-                <a:latin typeface="Helvetica Neue"/>
+                <a:latin typeface="Graphik"/>
               </a:rPr>
-              <a:t>Il modulo non è difficile. È scritto in una lingua che non è la tua.</a:t>
-            </a:r>
-          </a:p>
-        </p:txBody>
-      </p:sp>
-      <p:sp>
-        <p:nvSpPr>
-          <p:cNvPr id="5" name="Rounded Rectangle 4"/>
+              <a:t>Il modulo non è difficile.
+È scritto in una lingua che non è la tua.</a:t>
+            </a:r>
+          </a:p>
+        </p:txBody>
+      </p:sp>
+      <p:sp>
+        <p:nvSpPr>
+          <p:cNvPr id="5" name="Rectangle 4"/>
           <p:cNvSpPr/>
           <p:nvPr/>
         </p:nvSpPr>
         <p:spPr>
           <a:xfrm>
-            <a:off x="914400" y="2377440"/>
-            <a:ext cx="10332720" cy="1371600"/>
-          </a:xfrm>
-          <a:prstGeom prst="roundRect">
-            <a:avLst>
-              <a:gd name="adj" fmla="val 6000"/>
-            </a:avLst>
+            <a:off x="868680" y="2514600"/>
+            <a:ext cx="10469880" cy="1325880"/>
+          </a:xfrm>
+          <a:prstGeom prst="rect">
+            <a:avLst/>
           </a:prstGeom>
           <a:solidFill>
-            <a:srgbClr val="FDF6E3"/>
+            <a:srgbClr val="E6E6DC"/>
           </a:solidFill>
-          <a:ln w="12700">
-            <a:solidFill>
-              <a:srgbClr val="B45309"/>
-            </a:solidFill>
+          <a:ln>
+            <a:noFill/>
           </a:ln>
           <a:effectLst/>
         </p:spPr>
@@ -4403,110 +4390,20 @@
       </p:sp>
       <p:sp>
         <p:nvSpPr>
-          <p:cNvPr id="6" name="TextBox 5"/>
-          <p:cNvSpPr txBox="1"/>
-          <p:nvPr/>
-        </p:nvSpPr>
-        <p:spPr>
-          <a:xfrm>
-            <a:off x="1325880" y="2651760"/>
-            <a:ext cx="9509760" cy="914400"/>
-          </a:xfrm>
-          <a:prstGeom prst="rect">
-            <a:avLst/>
-          </a:prstGeom>
-          <a:noFill/>
-        </p:spPr>
-        <p:txBody>
-          <a:bodyPr wrap="square" anchor="t" lIns="0" rIns="0" tIns="0" bIns="0">
-            <a:spAutoFit/>
-          </a:bodyPr>
-          <a:lstStyle/>
-          <a:p>
-            <a:pPr algn="l">
-              <a:lnSpc>
-                <a:spcPct val="120000"/>
-              </a:lnSpc>
-              <a:spcBef>
-                <a:spcPts val="0"/>
-              </a:spcBef>
-              <a:spcAft>
-                <a:spcPts val="0"/>
-              </a:spcAft>
-            </a:pPr>
-            <a:r>
-              <a:rPr sz="2100" b="0" i="1">
-                <a:solidFill>
-                  <a:srgbClr val="B45309"/>
-                </a:solidFill>
-                <a:latin typeface="Helvetica Neue"/>
-              </a:rPr>
-              <a:t>«Estremi del titolo di occupazione dell'alloggio ai sensi dell'art. 5 D.L. 47/2014»</a:t>
-            </a:r>
-          </a:p>
-        </p:txBody>
-      </p:sp>
-      <p:sp>
-        <p:nvSpPr>
-          <p:cNvPr id="7" name="TextBox 6"/>
-          <p:cNvSpPr txBox="1"/>
-          <p:nvPr/>
-        </p:nvSpPr>
-        <p:spPr>
-          <a:xfrm>
-            <a:off x="1325880" y="3246120"/>
-            <a:ext cx="9509760" cy="365760"/>
-          </a:xfrm>
-          <a:prstGeom prst="rect">
-            <a:avLst/>
-          </a:prstGeom>
-          <a:noFill/>
-        </p:spPr>
-        <p:txBody>
-          <a:bodyPr wrap="square" anchor="t" lIns="0" rIns="0" tIns="0" bIns="0">
-            <a:spAutoFit/>
-          </a:bodyPr>
-          <a:lstStyle/>
-          <a:p>
-            <a:pPr algn="l">
-              <a:lnSpc>
-                <a:spcPct val="100000"/>
-              </a:lnSpc>
-              <a:spcBef>
-                <a:spcPts val="0"/>
-              </a:spcBef>
-              <a:spcAft>
-                <a:spcPts val="0"/>
-              </a:spcAft>
-            </a:pPr>
-            <a:r>
-              <a:rPr sz="1200" b="0" i="0">
-                <a:solidFill>
-                  <a:srgbClr val="5A5F66"/>
-                </a:solidFill>
-                <a:latin typeface="Helvetica Neue"/>
-              </a:rPr>
-              <a:t>Campo reale di una dichiarazione di residenza comunale</a:t>
-            </a:r>
-          </a:p>
-        </p:txBody>
-      </p:sp>
-      <p:sp>
-        <p:nvSpPr>
-          <p:cNvPr id="8" name="Rectangle 7"/>
+          <p:cNvPr id="6" name="Rectangle 5"/>
           <p:cNvSpPr/>
           <p:nvPr/>
         </p:nvSpPr>
         <p:spPr>
           <a:xfrm>
-            <a:off x="914400" y="4160520"/>
-            <a:ext cx="3108960" cy="25400"/>
+            <a:off x="868680" y="2514600"/>
+            <a:ext cx="50800" cy="1325880"/>
           </a:xfrm>
           <a:prstGeom prst="rect">
             <a:avLst/>
           </a:prstGeom>
           <a:solidFill>
-            <a:srgbClr val="004A8F"/>
+            <a:srgbClr val="A100FF"/>
           </a:solidFill>
           <a:ln>
             <a:noFill/>
@@ -4537,14 +4434,56 @@
       </p:sp>
       <p:sp>
         <p:nvSpPr>
-          <p:cNvPr id="9" name="TextBox 8"/>
+          <p:cNvPr id="7" name="TextBox 6"/>
           <p:cNvSpPr txBox="1"/>
           <p:nvPr/>
         </p:nvSpPr>
         <p:spPr>
           <a:xfrm>
-            <a:off x="914400" y="4389120"/>
-            <a:ext cx="3108960" cy="411480"/>
+            <a:off x="1252728" y="2761488"/>
+            <a:ext cx="9601200" cy="548640"/>
+          </a:xfrm>
+          <a:prstGeom prst="rect">
+            <a:avLst/>
+          </a:prstGeom>
+          <a:noFill/>
+        </p:spPr>
+        <p:txBody>
+          <a:bodyPr wrap="square" anchor="t" lIns="0" rIns="0" tIns="0" bIns="0">
+            <a:spAutoFit/>
+          </a:bodyPr>
+          <a:lstStyle/>
+          <a:p>
+            <a:pPr algn="l">
+              <a:lnSpc>
+                <a:spcPct val="120000"/>
+              </a:lnSpc>
+              <a:spcAft>
+                <a:spcPts val="0"/>
+              </a:spcAft>
+            </a:pPr>
+            <a:r>
+              <a:rPr sz="2000" b="0" i="1">
+                <a:solidFill>
+                  <a:srgbClr val="000000"/>
+                </a:solidFill>
+                <a:latin typeface="Graphik"/>
+              </a:rPr>
+              <a:t>«Estremi del titolo di occupazione dell'alloggio ai sensi dell'art. 5 D.L. 47/2014»</a:t>
+            </a:r>
+          </a:p>
+        </p:txBody>
+      </p:sp>
+      <p:sp>
+        <p:nvSpPr>
+          <p:cNvPr id="8" name="TextBox 7"/>
+          <p:cNvSpPr txBox="1"/>
+          <p:nvPr/>
+        </p:nvSpPr>
+        <p:spPr>
+          <a:xfrm>
+            <a:off x="1252728" y="3364992"/>
+            <a:ext cx="9601200" cy="320040"/>
           </a:xfrm>
           <a:prstGeom prst="rect">
             <a:avLst/>
@@ -4561,86 +4500,38 @@
               <a:lnSpc>
                 <a:spcPct val="100000"/>
               </a:lnSpc>
-              <a:spcBef>
-                <a:spcPts val="0"/>
-              </a:spcBef>
               <a:spcAft>
                 <a:spcPts val="0"/>
               </a:spcAft>
             </a:pPr>
             <a:r>
-              <a:rPr sz="1800" b="1" i="0">
+              <a:rPr sz="1150" b="0" i="0">
                 <a:solidFill>
-                  <a:srgbClr val="141416"/>
+                  <a:srgbClr val="55554E"/>
                 </a:solidFill>
-                <a:latin typeface="Helvetica Neue"/>
+                <a:latin typeface="Graphik"/>
               </a:rPr>
-              <a:t>Si ferma prima di iniziare</a:t>
-            </a:r>
-          </a:p>
-        </p:txBody>
-      </p:sp>
-      <p:sp>
-        <p:nvSpPr>
-          <p:cNvPr id="10" name="TextBox 9"/>
-          <p:cNvSpPr txBox="1"/>
-          <p:nvPr/>
-        </p:nvSpPr>
-        <p:spPr>
-          <a:xfrm>
-            <a:off x="914400" y="4892040"/>
-            <a:ext cx="3108960" cy="1005840"/>
-          </a:xfrm>
-          <a:prstGeom prst="rect">
-            <a:avLst/>
-          </a:prstGeom>
-          <a:noFill/>
-        </p:spPr>
-        <p:txBody>
-          <a:bodyPr wrap="square" anchor="t" lIns="0" rIns="0" tIns="0" bIns="0">
-            <a:spAutoFit/>
-          </a:bodyPr>
-          <a:lstStyle/>
-          <a:p>
-            <a:pPr algn="l">
-              <a:lnSpc>
-                <a:spcPct val="130000"/>
-              </a:lnSpc>
-              <a:spcBef>
-                <a:spcPts val="0"/>
-              </a:spcBef>
-              <a:spcAft>
-                <a:spcPts val="0"/>
-              </a:spcAft>
-            </a:pPr>
-            <a:r>
-              <a:rPr sz="1400" b="0" i="0">
-                <a:solidFill>
-                  <a:srgbClr val="5A5F66"/>
-                </a:solidFill>
-                <a:latin typeface="Helvetica Neue"/>
-              </a:rPr>
-              <a:t>Non sa quale informazione le stia chiedendo, non come scriverla.</a:t>
-            </a:r>
-          </a:p>
-        </p:txBody>
-      </p:sp>
-      <p:sp>
-        <p:nvSpPr>
-          <p:cNvPr id="11" name="Rectangle 10"/>
+              <a:t>Campo reale di una dichiarazione di residenza comunale</a:t>
+            </a:r>
+          </a:p>
+        </p:txBody>
+      </p:sp>
+      <p:sp>
+        <p:nvSpPr>
+          <p:cNvPr id="9" name="Rectangle 8"/>
           <p:cNvSpPr/>
           <p:nvPr/>
         </p:nvSpPr>
         <p:spPr>
           <a:xfrm>
-            <a:off x="4434840" y="4160520"/>
+            <a:off x="868680" y="4343400"/>
             <a:ext cx="3108960" cy="25400"/>
           </a:xfrm>
           <a:prstGeom prst="rect">
             <a:avLst/>
           </a:prstGeom>
           <a:solidFill>
-            <a:srgbClr val="004A8F"/>
+            <a:srgbClr val="A100FF"/>
           </a:solidFill>
           <a:ln>
             <a:noFill/>
@@ -4671,14 +4562,14 @@
       </p:sp>
       <p:sp>
         <p:nvSpPr>
-          <p:cNvPr id="12" name="TextBox 11"/>
+          <p:cNvPr id="10" name="TextBox 9"/>
           <p:cNvSpPr txBox="1"/>
           <p:nvPr/>
         </p:nvSpPr>
         <p:spPr>
           <a:xfrm>
-            <a:off x="4434840" y="4389120"/>
-            <a:ext cx="3108960" cy="411480"/>
+            <a:off x="868680" y="4572000"/>
+            <a:ext cx="3108960" cy="365760"/>
           </a:xfrm>
           <a:prstGeom prst="rect">
             <a:avLst/>
@@ -4695,35 +4586,32 @@
               <a:lnSpc>
                 <a:spcPct val="100000"/>
               </a:lnSpc>
-              <a:spcBef>
-                <a:spcPts val="0"/>
-              </a:spcBef>
               <a:spcAft>
                 <a:spcPts val="0"/>
               </a:spcAft>
             </a:pPr>
             <a:r>
-              <a:rPr sz="1800" b="1" i="0">
+              <a:rPr sz="1750" b="1" i="0">
                 <a:solidFill>
-                  <a:srgbClr val="141416"/>
+                  <a:srgbClr val="000000"/>
                 </a:solidFill>
-                <a:latin typeface="Helvetica Neue"/>
+                <a:latin typeface="Graphik"/>
               </a:rPr>
-              <a:t>Chiede aiuto a qualcuno</a:t>
-            </a:r>
-          </a:p>
-        </p:txBody>
-      </p:sp>
-      <p:sp>
-        <p:nvSpPr>
-          <p:cNvPr id="13" name="TextBox 12"/>
+              <a:t>Si ferma prima di iniziare</a:t>
+            </a:r>
+          </a:p>
+        </p:txBody>
+      </p:sp>
+      <p:sp>
+        <p:nvSpPr>
+          <p:cNvPr id="11" name="TextBox 10"/>
           <p:cNvSpPr txBox="1"/>
           <p:nvPr/>
         </p:nvSpPr>
         <p:spPr>
           <a:xfrm>
-            <a:off x="4434840" y="4892040"/>
-            <a:ext cx="3108960" cy="1005840"/>
+            <a:off x="868680" y="5047488"/>
+            <a:ext cx="3108960" cy="914400"/>
           </a:xfrm>
           <a:prstGeom prst="rect">
             <a:avLst/>
@@ -4740,41 +4628,38 @@
               <a:lnSpc>
                 <a:spcPct val="130000"/>
               </a:lnSpc>
-              <a:spcBef>
-                <a:spcPts val="0"/>
-              </a:spcBef>
               <a:spcAft>
                 <a:spcPts val="0"/>
               </a:spcAft>
             </a:pPr>
             <a:r>
-              <a:rPr sz="1400" b="0" i="0">
+              <a:rPr sz="1350" b="0" i="0">
                 <a:solidFill>
-                  <a:srgbClr val="5A5F66"/>
+                  <a:srgbClr val="55554E"/>
                 </a:solidFill>
-                <a:latin typeface="Helvetica Neue"/>
+                <a:latin typeface="Graphik"/>
               </a:rPr>
-              <a:t>Un figlio, un patronato, un CAF. Ogni volta perde autonomia.</a:t>
-            </a:r>
-          </a:p>
-        </p:txBody>
-      </p:sp>
-      <p:sp>
-        <p:nvSpPr>
-          <p:cNvPr id="14" name="Rectangle 13"/>
+              <a:t>Non sa quale informazione le stia chiedendo, né come scriverla.</a:t>
+            </a:r>
+          </a:p>
+        </p:txBody>
+      </p:sp>
+      <p:sp>
+        <p:nvSpPr>
+          <p:cNvPr id="12" name="Rectangle 11"/>
           <p:cNvSpPr/>
           <p:nvPr/>
         </p:nvSpPr>
         <p:spPr>
           <a:xfrm>
-            <a:off x="7955279" y="4160520"/>
+            <a:off x="4462272" y="4343400"/>
             <a:ext cx="3108960" cy="25400"/>
           </a:xfrm>
           <a:prstGeom prst="rect">
             <a:avLst/>
           </a:prstGeom>
           <a:solidFill>
-            <a:srgbClr val="004A8F"/>
+            <a:srgbClr val="A100FF"/>
           </a:solidFill>
           <a:ln>
             <a:noFill/>
@@ -4805,14 +4690,14 @@
       </p:sp>
       <p:sp>
         <p:nvSpPr>
-          <p:cNvPr id="15" name="TextBox 14"/>
+          <p:cNvPr id="13" name="TextBox 12"/>
           <p:cNvSpPr txBox="1"/>
           <p:nvPr/>
         </p:nvSpPr>
         <p:spPr>
           <a:xfrm>
-            <a:off x="7955279" y="4389120"/>
-            <a:ext cx="3108960" cy="411480"/>
+            <a:off x="4462272" y="4572000"/>
+            <a:ext cx="3108960" cy="365760"/>
           </a:xfrm>
           <a:prstGeom prst="rect">
             <a:avLst/>
@@ -4829,35 +4714,32 @@
               <a:lnSpc>
                 <a:spcPct val="100000"/>
               </a:lnSpc>
-              <a:spcBef>
-                <a:spcPts val="0"/>
-              </a:spcBef>
               <a:spcAft>
                 <a:spcPts val="0"/>
               </a:spcAft>
             </a:pPr>
             <a:r>
-              <a:rPr sz="1800" b="1" i="0">
+              <a:rPr sz="1750" b="1" i="0">
                 <a:solidFill>
-                  <a:srgbClr val="141416"/>
+                  <a:srgbClr val="000000"/>
                 </a:solidFill>
-                <a:latin typeface="Helvetica Neue"/>
+                <a:latin typeface="Graphik"/>
               </a:rPr>
-              <a:t>Il modulo resta bianco</a:t>
-            </a:r>
-          </a:p>
-        </p:txBody>
-      </p:sp>
-      <p:sp>
-        <p:nvSpPr>
-          <p:cNvPr id="16" name="TextBox 15"/>
+              <a:t>Chiede aiuto a qualcuno</a:t>
+            </a:r>
+          </a:p>
+        </p:txBody>
+      </p:sp>
+      <p:sp>
+        <p:nvSpPr>
+          <p:cNvPr id="14" name="TextBox 13"/>
           <p:cNvSpPr txBox="1"/>
           <p:nvPr/>
         </p:nvSpPr>
         <p:spPr>
           <a:xfrm>
-            <a:off x="7955279" y="4892040"/>
-            <a:ext cx="3108960" cy="1005840"/>
+            <a:off x="4462272" y="5047488"/>
+            <a:ext cx="3108960" cy="914400"/>
           </a:xfrm>
           <a:prstGeom prst="rect">
             <a:avLst/>
@@ -4874,25 +4756,174 @@
               <a:lnSpc>
                 <a:spcPct val="130000"/>
               </a:lnSpc>
-              <a:spcBef>
-                <a:spcPts val="0"/>
-              </a:spcBef>
               <a:spcAft>
                 <a:spcPts val="0"/>
               </a:spcAft>
             </a:pPr>
             <a:r>
-              <a:rPr sz="1400" b="0" i="0">
+              <a:rPr sz="1350" b="0" i="0">
                 <a:solidFill>
-                  <a:srgbClr val="5A5F66"/>
+                  <a:srgbClr val="55554E"/>
                 </a:solidFill>
-                <a:latin typeface="Helvetica Neue"/>
+                <a:latin typeface="Graphik"/>
+              </a:rPr>
+              <a:t>Un figlio, un patronato, un CAF. Ogni volta perde autonomia.</a:t>
+            </a:r>
+          </a:p>
+        </p:txBody>
+      </p:sp>
+      <p:sp>
+        <p:nvSpPr>
+          <p:cNvPr id="15" name="Rectangle 14"/>
+          <p:cNvSpPr/>
+          <p:nvPr/>
+        </p:nvSpPr>
+        <p:spPr>
+          <a:xfrm>
+            <a:off x="8055864" y="4343400"/>
+            <a:ext cx="3108960" cy="25400"/>
+          </a:xfrm>
+          <a:prstGeom prst="rect">
+            <a:avLst/>
+          </a:prstGeom>
+          <a:solidFill>
+            <a:srgbClr val="A100FF"/>
+          </a:solidFill>
+          <a:ln>
+            <a:noFill/>
+          </a:ln>
+          <a:effectLst/>
+        </p:spPr>
+        <p:style>
+          <a:lnRef idx="1">
+            <a:schemeClr val="accent1"/>
+          </a:lnRef>
+          <a:fillRef idx="3">
+            <a:schemeClr val="accent1"/>
+          </a:fillRef>
+          <a:effectRef idx="2">
+            <a:schemeClr val="accent1"/>
+          </a:effectRef>
+          <a:fontRef idx="minor">
+            <a:schemeClr val="lt1"/>
+          </a:fontRef>
+        </p:style>
+        <p:txBody>
+          <a:bodyPr rtlCol="0" anchor="ctr"/>
+          <a:lstStyle/>
+          <a:p>
+            <a:pPr algn="ctr"/>
+          </a:p>
+        </p:txBody>
+      </p:sp>
+      <p:sp>
+        <p:nvSpPr>
+          <p:cNvPr id="16" name="TextBox 15"/>
+          <p:cNvSpPr txBox="1"/>
+          <p:nvPr/>
+        </p:nvSpPr>
+        <p:spPr>
+          <a:xfrm>
+            <a:off x="8055864" y="4572000"/>
+            <a:ext cx="3108960" cy="365760"/>
+          </a:xfrm>
+          <a:prstGeom prst="rect">
+            <a:avLst/>
+          </a:prstGeom>
+          <a:noFill/>
+        </p:spPr>
+        <p:txBody>
+          <a:bodyPr wrap="square" anchor="t" lIns="0" rIns="0" tIns="0" bIns="0">
+            <a:spAutoFit/>
+          </a:bodyPr>
+          <a:lstStyle/>
+          <a:p>
+            <a:pPr algn="l">
+              <a:lnSpc>
+                <a:spcPct val="100000"/>
+              </a:lnSpc>
+              <a:spcAft>
+                <a:spcPts val="0"/>
+              </a:spcAft>
+            </a:pPr>
+            <a:r>
+              <a:rPr sz="1750" b="1" i="0">
+                <a:solidFill>
+                  <a:srgbClr val="000000"/>
+                </a:solidFill>
+                <a:latin typeface="Graphik"/>
+              </a:rPr>
+              <a:t>Il modulo resta bianco</a:t>
+            </a:r>
+          </a:p>
+        </p:txBody>
+      </p:sp>
+      <p:sp>
+        <p:nvSpPr>
+          <p:cNvPr id="17" name="TextBox 16"/>
+          <p:cNvSpPr txBox="1"/>
+          <p:nvPr/>
+        </p:nvSpPr>
+        <p:spPr>
+          <a:xfrm>
+            <a:off x="8055864" y="5047488"/>
+            <a:ext cx="3108960" cy="914400"/>
+          </a:xfrm>
+          <a:prstGeom prst="rect">
+            <a:avLst/>
+          </a:prstGeom>
+          <a:noFill/>
+        </p:spPr>
+        <p:txBody>
+          <a:bodyPr wrap="square" anchor="t" lIns="0" rIns="0" tIns="0" bIns="0">
+            <a:spAutoFit/>
+          </a:bodyPr>
+          <a:lstStyle/>
+          <a:p>
+            <a:pPr algn="l">
+              <a:lnSpc>
+                <a:spcPct val="130000"/>
+              </a:lnSpc>
+              <a:spcAft>
+                <a:spcPts val="0"/>
+              </a:spcAft>
+            </a:pPr>
+            <a:r>
+              <a:rPr sz="1350" b="0" i="0">
+                <a:solidFill>
+                  <a:srgbClr val="55554E"/>
+                </a:solidFill>
+                <a:latin typeface="Graphik"/>
               </a:rPr>
               <a:t>E con lui la pratica: la residenza, il contributo, il diritto.</a:t>
             </a:r>
           </a:p>
         </p:txBody>
       </p:sp>
+      <p:pic>
+        <p:nvPicPr>
+          <p:cNvPr id="18" name="Picture 17" descr="accenture-technology-scuro.png"/>
+          <p:cNvPicPr>
+            <a:picLocks noChangeAspect="1"/>
+          </p:cNvPicPr>
+          <p:nvPr/>
+        </p:nvPicPr>
+        <p:blipFill>
+          <a:blip r:embed="rId2"/>
+          <a:stretch>
+            <a:fillRect/>
+          </a:stretch>
+        </p:blipFill>
+        <p:spPr>
+          <a:xfrm>
+            <a:off x="9933127" y="6254782"/>
+            <a:ext cx="1600200" cy="146018"/>
+          </a:xfrm>
+          <a:prstGeom prst="rect">
+            <a:avLst/>
+          </a:prstGeom>
+        </p:spPr>
+      </p:pic>
     </p:spTree>
   </p:cSld>
   <p:clrMapOvr>
@@ -4963,8 +4994,8 @@
         </p:nvSpPr>
         <p:spPr>
           <a:xfrm>
-            <a:off x="914400" y="731520"/>
-            <a:ext cx="8229600" cy="274320"/>
+            <a:off x="868680" y="749808"/>
+            <a:ext cx="8229600" cy="256032"/>
           </a:xfrm>
           <a:prstGeom prst="rect">
             <a:avLst/>
@@ -4981,19 +5012,16 @@
               <a:lnSpc>
                 <a:spcPct val="100000"/>
               </a:lnSpc>
-              <a:spcBef>
-                <a:spcPts val="0"/>
-              </a:spcBef>
               <a:spcAft>
                 <a:spcPts val="0"/>
               </a:spcAft>
             </a:pPr>
             <a:r>
-              <a:rPr sz="1200" b="1" i="0">
+              <a:rPr sz="1150" b="1" i="0">
                 <a:solidFill>
-                  <a:srgbClr val="004A8F"/>
+                  <a:srgbClr val="A100FF"/>
                 </a:solidFill>
-                <a:latin typeface="Helvetica Neue"/>
+                <a:latin typeface="Graphik"/>
               </a:rPr>
               <a:t>LA SOLUZIONE</a:t>
             </a:r>
@@ -5008,8 +5036,8 @@
         </p:nvSpPr>
         <p:spPr>
           <a:xfrm>
-            <a:off x="914400" y="1097280"/>
-            <a:ext cx="6400800" cy="1371600"/>
+            <a:off x="868680" y="1097280"/>
+            <a:ext cx="6217920" cy="1371600"/>
           </a:xfrm>
           <a:prstGeom prst="rect">
             <a:avLst/>
@@ -5026,19 +5054,16 @@
               <a:lnSpc>
                 <a:spcPct val="115000"/>
               </a:lnSpc>
-              <a:spcBef>
-                <a:spcPts val="0"/>
-              </a:spcBef>
               <a:spcAft>
                 <a:spcPts val="0"/>
               </a:spcAft>
             </a:pPr>
             <a:r>
-              <a:rPr sz="3400" b="1" i="0">
+              <a:rPr sz="3300" b="1" i="0">
                 <a:solidFill>
-                  <a:srgbClr val="141416"/>
+                  <a:srgbClr val="000000"/>
                 </a:solidFill>
-                <a:latin typeface="Helvetica Neue"/>
+                <a:latin typeface="Graphik"/>
               </a:rPr>
               <a:t>Una domanda alla volta,
 in italiano semplice.</a:t>
@@ -5054,14 +5079,14 @@
         </p:nvSpPr>
         <p:spPr>
           <a:xfrm>
-            <a:off x="914400" y="2514600"/>
-            <a:ext cx="566928" cy="566928"/>
+            <a:off x="868680" y="2606040"/>
+            <a:ext cx="530352" cy="530352"/>
           </a:xfrm>
           <a:prstGeom prst="rect">
             <a:avLst/>
           </a:prstGeom>
           <a:solidFill>
-            <a:srgbClr val="004A8F"/>
+            <a:srgbClr val="A100FF"/>
           </a:solidFill>
           <a:ln>
             <a:noFill/>
@@ -5098,8 +5123,8 @@
         </p:nvSpPr>
         <p:spPr>
           <a:xfrm>
-            <a:off x="914400" y="2624328"/>
-            <a:ext cx="566928" cy="365760"/>
+            <a:off x="868680" y="2711196"/>
+            <a:ext cx="530352" cy="365760"/>
           </a:xfrm>
           <a:prstGeom prst="rect">
             <a:avLst/>
@@ -5116,19 +5141,16 @@
               <a:lnSpc>
                 <a:spcPct val="100000"/>
               </a:lnSpc>
-              <a:spcBef>
-                <a:spcPts val="0"/>
-              </a:spcBef>
               <a:spcAft>
                 <a:spcPts val="0"/>
               </a:spcAft>
             </a:pPr>
             <a:r>
-              <a:rPr sz="2000" b="1" i="0">
+              <a:rPr sz="1900" b="1" i="0">
                 <a:solidFill>
                   <a:srgbClr val="FFFFFF"/>
                 </a:solidFill>
-                <a:latin typeface="Helvetica Neue"/>
+                <a:latin typeface="Graphik"/>
               </a:rPr>
               <a:t>1</a:t>
             </a:r>
@@ -5143,8 +5165,8 @@
         </p:nvSpPr>
         <p:spPr>
           <a:xfrm>
-            <a:off x="1691640" y="2532888"/>
-            <a:ext cx="5120640" cy="365760"/>
+            <a:off x="1645920" y="2606040"/>
+            <a:ext cx="4937760" cy="365760"/>
           </a:xfrm>
           <a:prstGeom prst="rect">
             <a:avLst/>
@@ -5161,19 +5183,16 @@
               <a:lnSpc>
                 <a:spcPct val="100000"/>
               </a:lnSpc>
-              <a:spcBef>
-                <a:spcPts val="0"/>
-              </a:spcBef>
               <a:spcAft>
                 <a:spcPts val="0"/>
               </a:spcAft>
             </a:pPr>
             <a:r>
-              <a:rPr sz="2000" b="1" i="0">
+              <a:rPr sz="1900" b="1" i="0">
                 <a:solidFill>
-                  <a:srgbClr val="141416"/>
+                  <a:srgbClr val="000000"/>
                 </a:solidFill>
-                <a:latin typeface="Helvetica Neue"/>
+                <a:latin typeface="Graphik"/>
               </a:rPr>
               <a:t>Carica il PDF</a:t>
             </a:r>
@@ -5188,8 +5207,8 @@
         </p:nvSpPr>
         <p:spPr>
           <a:xfrm>
-            <a:off x="1691640" y="2971800"/>
-            <a:ext cx="5120640" cy="548640"/>
+            <a:off x="1645920" y="3026664"/>
+            <a:ext cx="4937760" cy="548640"/>
           </a:xfrm>
           <a:prstGeom prst="rect">
             <a:avLst/>
@@ -5206,19 +5225,16 @@
               <a:lnSpc>
                 <a:spcPct val="125000"/>
               </a:lnSpc>
-              <a:spcBef>
-                <a:spcPts val="0"/>
-              </a:spcBef>
               <a:spcAft>
                 <a:spcPts val="0"/>
               </a:spcAft>
             </a:pPr>
             <a:r>
-              <a:rPr sz="1350" b="0" i="0">
+              <a:rPr sz="1300" b="0" i="0">
                 <a:solidFill>
-                  <a:srgbClr val="5A5F66"/>
+                  <a:srgbClr val="55554E"/>
                 </a:solidFill>
-                <a:latin typeface="Helvetica Neue"/>
+                <a:latin typeface="Graphik"/>
               </a:rPr>
               <a:t>Un solo pulsante. Nessuna registrazione, nessuna configurazione.</a:t>
             </a:r>
@@ -5233,14 +5249,14 @@
         </p:nvSpPr>
         <p:spPr>
           <a:xfrm>
-            <a:off x="914400" y="3749039"/>
-            <a:ext cx="566928" cy="566928"/>
+            <a:off x="868680" y="3794760"/>
+            <a:ext cx="530352" cy="530352"/>
           </a:xfrm>
           <a:prstGeom prst="rect">
             <a:avLst/>
           </a:prstGeom>
           <a:solidFill>
-            <a:srgbClr val="004A8F"/>
+            <a:srgbClr val="A100FF"/>
           </a:solidFill>
           <a:ln>
             <a:noFill/>
@@ -5277,8 +5293,8 @@
         </p:nvSpPr>
         <p:spPr>
           <a:xfrm>
-            <a:off x="914400" y="3858767"/>
-            <a:ext cx="566928" cy="365760"/>
+            <a:off x="868680" y="3899916"/>
+            <a:ext cx="530352" cy="365760"/>
           </a:xfrm>
           <a:prstGeom prst="rect">
             <a:avLst/>
@@ -5295,19 +5311,16 @@
               <a:lnSpc>
                 <a:spcPct val="100000"/>
               </a:lnSpc>
-              <a:spcBef>
-                <a:spcPts val="0"/>
-              </a:spcBef>
               <a:spcAft>
                 <a:spcPts val="0"/>
               </a:spcAft>
             </a:pPr>
             <a:r>
-              <a:rPr sz="2000" b="1" i="0">
+              <a:rPr sz="1900" b="1" i="0">
                 <a:solidFill>
                   <a:srgbClr val="FFFFFF"/>
                 </a:solidFill>
-                <a:latin typeface="Helvetica Neue"/>
+                <a:latin typeface="Graphik"/>
               </a:rPr>
               <a:t>2</a:t>
             </a:r>
@@ -5322,8 +5335,8 @@
         </p:nvSpPr>
         <p:spPr>
           <a:xfrm>
-            <a:off x="1691640" y="3767327"/>
-            <a:ext cx="5120640" cy="365760"/>
+            <a:off x="1645920" y="3794760"/>
+            <a:ext cx="4937760" cy="365760"/>
           </a:xfrm>
           <a:prstGeom prst="rect">
             <a:avLst/>
@@ -5340,19 +5353,16 @@
               <a:lnSpc>
                 <a:spcPct val="100000"/>
               </a:lnSpc>
-              <a:spcBef>
-                <a:spcPts val="0"/>
-              </a:spcBef>
               <a:spcAft>
                 <a:spcPts val="0"/>
               </a:spcAft>
             </a:pPr>
             <a:r>
-              <a:rPr sz="2000" b="1" i="0">
+              <a:rPr sz="1900" b="1" i="0">
                 <a:solidFill>
-                  <a:srgbClr val="141416"/>
+                  <a:srgbClr val="000000"/>
                 </a:solidFill>
-                <a:latin typeface="Helvetica Neue"/>
+                <a:latin typeface="Graphik"/>
               </a:rPr>
               <a:t>Rispondi</a:t>
             </a:r>
@@ -5367,8 +5377,8 @@
         </p:nvSpPr>
         <p:spPr>
           <a:xfrm>
-            <a:off x="1691640" y="4206239"/>
-            <a:ext cx="5120640" cy="548640"/>
+            <a:off x="1645920" y="4215384"/>
+            <a:ext cx="4937760" cy="548640"/>
           </a:xfrm>
           <a:prstGeom prst="rect">
             <a:avLst/>
@@ -5385,19 +5395,16 @@
               <a:lnSpc>
                 <a:spcPct val="125000"/>
               </a:lnSpc>
-              <a:spcBef>
-                <a:spcPts val="0"/>
-              </a:spcBef>
               <a:spcAft>
                 <a:spcPts val="0"/>
               </a:spcAft>
             </a:pPr>
             <a:r>
-              <a:rPr sz="1350" b="0" i="0">
+              <a:rPr sz="1300" b="0" i="0">
                 <a:solidFill>
-                  <a:srgbClr val="5A5F66"/>
+                  <a:srgbClr val="55554E"/>
                 </a:solidFill>
-                <a:latin typeface="Helvetica Neue"/>
+                <a:latin typeface="Graphik"/>
               </a:rPr>
               <a:t>Una domanda per schermata, in linguaggio comune.</a:t>
             </a:r>
@@ -5412,14 +5419,14 @@
         </p:nvSpPr>
         <p:spPr>
           <a:xfrm>
-            <a:off x="914400" y="4983480"/>
-            <a:ext cx="566928" cy="566928"/>
+            <a:off x="868680" y="4983480"/>
+            <a:ext cx="530352" cy="530352"/>
           </a:xfrm>
           <a:prstGeom prst="rect">
             <a:avLst/>
           </a:prstGeom>
           <a:solidFill>
-            <a:srgbClr val="004A8F"/>
+            <a:srgbClr val="A100FF"/>
           </a:solidFill>
           <a:ln>
             <a:noFill/>
@@ -5456,8 +5463,8 @@
         </p:nvSpPr>
         <p:spPr>
           <a:xfrm>
-            <a:off x="914400" y="5093208"/>
-            <a:ext cx="566928" cy="365760"/>
+            <a:off x="868680" y="5088636"/>
+            <a:ext cx="530352" cy="365760"/>
           </a:xfrm>
           <a:prstGeom prst="rect">
             <a:avLst/>
@@ -5474,19 +5481,16 @@
               <a:lnSpc>
                 <a:spcPct val="100000"/>
               </a:lnSpc>
-              <a:spcBef>
-                <a:spcPts val="0"/>
-              </a:spcBef>
               <a:spcAft>
                 <a:spcPts val="0"/>
               </a:spcAft>
             </a:pPr>
             <a:r>
-              <a:rPr sz="2000" b="1" i="0">
+              <a:rPr sz="1900" b="1" i="0">
                 <a:solidFill>
                   <a:srgbClr val="FFFFFF"/>
                 </a:solidFill>
-                <a:latin typeface="Helvetica Neue"/>
+                <a:latin typeface="Graphik"/>
               </a:rPr>
               <a:t>3</a:t>
             </a:r>
@@ -5501,8 +5505,8 @@
         </p:nvSpPr>
         <p:spPr>
           <a:xfrm>
-            <a:off x="1691640" y="5001768"/>
-            <a:ext cx="5120640" cy="365760"/>
+            <a:off x="1645920" y="4983480"/>
+            <a:ext cx="4937760" cy="365760"/>
           </a:xfrm>
           <a:prstGeom prst="rect">
             <a:avLst/>
@@ -5519,19 +5523,16 @@
               <a:lnSpc>
                 <a:spcPct val="100000"/>
               </a:lnSpc>
-              <a:spcBef>
-                <a:spcPts val="0"/>
-              </a:spcBef>
               <a:spcAft>
                 <a:spcPts val="0"/>
               </a:spcAft>
             </a:pPr>
             <a:r>
-              <a:rPr sz="2000" b="1" i="0">
+              <a:rPr sz="1900" b="1" i="0">
                 <a:solidFill>
-                  <a:srgbClr val="141416"/>
+                  <a:srgbClr val="000000"/>
                 </a:solidFill>
-                <a:latin typeface="Helvetica Neue"/>
+                <a:latin typeface="Graphik"/>
               </a:rPr>
               <a:t>Scarica il modulo</a:t>
             </a:r>
@@ -5546,8 +5547,8 @@
         </p:nvSpPr>
         <p:spPr>
           <a:xfrm>
-            <a:off x="1691640" y="5440680"/>
-            <a:ext cx="5120640" cy="548640"/>
+            <a:off x="1645920" y="5404104"/>
+            <a:ext cx="4937760" cy="548640"/>
           </a:xfrm>
           <a:prstGeom prst="rect">
             <a:avLst/>
@@ -5564,19 +5565,16 @@
               <a:lnSpc>
                 <a:spcPct val="125000"/>
               </a:lnSpc>
-              <a:spcBef>
-                <a:spcPts val="0"/>
-              </a:spcBef>
               <a:spcAft>
                 <a:spcPts val="0"/>
               </a:spcAft>
             </a:pPr>
             <a:r>
-              <a:rPr sz="1350" b="0" i="0">
+              <a:rPr sz="1300" b="0" i="0">
                 <a:solidFill>
-                  <a:srgbClr val="5A5F66"/>
+                  <a:srgbClr val="55554E"/>
                 </a:solidFill>
-                <a:latin typeface="Helvetica Neue"/>
+                <a:latin typeface="Graphik"/>
               </a:rPr>
               <a:t>Il PDF compilato, pronto da stampare o inviare.</a:t>
             </a:r>
@@ -5591,8 +5589,8 @@
         </p:nvSpPr>
         <p:spPr>
           <a:xfrm>
-            <a:off x="7214235" y="2736747"/>
-            <a:ext cx="4225290" cy="1658826"/>
+            <a:off x="7077075" y="2764643"/>
+            <a:ext cx="4316730" cy="1694473"/>
           </a:xfrm>
           <a:prstGeom prst="rect">
             <a:avLst/>
@@ -5600,9 +5598,9 @@
           <a:solidFill>
             <a:srgbClr val="FFFFFF"/>
           </a:solidFill>
-          <a:ln w="9525">
+          <a:ln w="12700">
             <a:solidFill>
-              <a:srgbClr val="D8D8D4"/>
+              <a:srgbClr val="E6E6DC"/>
             </a:solidFill>
           </a:ln>
           <a:effectLst/>
@@ -5645,8 +5643,32 @@
         </p:blipFill>
         <p:spPr>
           <a:xfrm>
-            <a:off x="7223760" y="2746272"/>
-            <a:ext cx="4206240" cy="1639776"/>
+            <a:off x="7086600" y="2774168"/>
+            <a:ext cx="4297680" cy="1675423"/>
+          </a:xfrm>
+          <a:prstGeom prst="rect">
+            <a:avLst/>
+          </a:prstGeom>
+        </p:spPr>
+      </p:pic>
+      <p:pic>
+        <p:nvPicPr>
+          <p:cNvPr id="19" name="Picture 18" descr="accenture-technology-scuro.png"/>
+          <p:cNvPicPr>
+            <a:picLocks noChangeAspect="1"/>
+          </p:cNvPicPr>
+          <p:nvPr/>
+        </p:nvPicPr>
+        <p:blipFill>
+          <a:blip r:embed="rId3"/>
+          <a:stretch>
+            <a:fillRect/>
+          </a:stretch>
+        </p:blipFill>
+        <p:spPr>
+          <a:xfrm>
+            <a:off x="9933127" y="6254782"/>
+            <a:ext cx="1600200" cy="146018"/>
           </a:xfrm>
           <a:prstGeom prst="rect">
             <a:avLst/>
@@ -5686,7 +5708,7 @@
             <a:avLst/>
           </a:prstGeom>
           <a:solidFill>
-            <a:srgbClr val="F7F7F5"/>
+            <a:srgbClr val="FFFFFF"/>
           </a:solidFill>
           <a:ln>
             <a:noFill/>
@@ -5723,8 +5745,8 @@
         </p:nvSpPr>
         <p:spPr>
           <a:xfrm>
-            <a:off x="914400" y="685800"/>
-            <a:ext cx="8229600" cy="274320"/>
+            <a:off x="868680" y="731520"/>
+            <a:ext cx="8229600" cy="256032"/>
           </a:xfrm>
           <a:prstGeom prst="rect">
             <a:avLst/>
@@ -5741,19 +5763,16 @@
               <a:lnSpc>
                 <a:spcPct val="100000"/>
               </a:lnSpc>
-              <a:spcBef>
-                <a:spcPts val="0"/>
-              </a:spcBef>
               <a:spcAft>
                 <a:spcPts val="0"/>
               </a:spcAft>
             </a:pPr>
             <a:r>
-              <a:rPr sz="1200" b="1" i="0">
+              <a:rPr sz="1150" b="1" i="0">
                 <a:solidFill>
-                  <a:srgbClr val="004A8F"/>
+                  <a:srgbClr val="A100FF"/>
                 </a:solidFill>
-                <a:latin typeface="Helvetica Neue"/>
+                <a:latin typeface="Graphik"/>
               </a:rPr>
               <a:t>IL CUORE DEL PRODOTTO</a:t>
             </a:r>
@@ -5768,8 +5787,8 @@
         </p:nvSpPr>
         <p:spPr>
           <a:xfrm>
-            <a:off x="914400" y="1024128"/>
-            <a:ext cx="10332720" cy="640080"/>
+            <a:off x="868680" y="1051560"/>
+            <a:ext cx="10469880" cy="640080"/>
           </a:xfrm>
           <a:prstGeom prst="rect">
             <a:avLst/>
@@ -5786,19 +5805,16 @@
               <a:lnSpc>
                 <a:spcPct val="100000"/>
               </a:lnSpc>
-              <a:spcBef>
-                <a:spcPts val="0"/>
-              </a:spcBef>
               <a:spcAft>
                 <a:spcPts val="0"/>
               </a:spcAft>
             </a:pPr>
             <a:r>
-              <a:rPr sz="3400" b="1" i="0">
+              <a:rPr sz="3300" b="1" i="0">
                 <a:solidFill>
-                  <a:srgbClr val="141416"/>
+                  <a:srgbClr val="000000"/>
                 </a:solidFill>
-                <a:latin typeface="Helvetica Neue"/>
+                <a:latin typeface="Graphik"/>
               </a:rPr>
               <a:t>Semplificare senza tradire il significato</a:t>
             </a:r>
@@ -5807,27 +5823,23 @@
       </p:sp>
       <p:sp>
         <p:nvSpPr>
-          <p:cNvPr id="5" name="Rounded Rectangle 4"/>
+          <p:cNvPr id="5" name="Rectangle 4"/>
           <p:cNvSpPr/>
           <p:nvPr/>
         </p:nvSpPr>
         <p:spPr>
           <a:xfrm>
-            <a:off x="914400" y="1920240"/>
-            <a:ext cx="4846320" cy="1600200"/>
-          </a:xfrm>
-          <a:prstGeom prst="roundRect">
-            <a:avLst>
-              <a:gd name="adj" fmla="val 6000"/>
-            </a:avLst>
+            <a:off x="868680" y="1920240"/>
+            <a:ext cx="4754880" cy="1554480"/>
+          </a:xfrm>
+          <a:prstGeom prst="rect">
+            <a:avLst/>
           </a:prstGeom>
           <a:solidFill>
-            <a:srgbClr val="FFFFFF"/>
+            <a:srgbClr val="E6E6DC"/>
           </a:solidFill>
-          <a:ln w="12700">
-            <a:solidFill>
-              <a:srgbClr val="D8D8D4"/>
-            </a:solidFill>
+          <a:ln>
+            <a:noFill/>
           </a:ln>
           <a:effectLst/>
         </p:spPr>
@@ -5861,8 +5873,8 @@
         </p:nvSpPr>
         <p:spPr>
           <a:xfrm>
-            <a:off x="1234440" y="2148840"/>
-            <a:ext cx="4297680" cy="274320"/>
+            <a:off x="1216152" y="2148840"/>
+            <a:ext cx="4114800" cy="274320"/>
           </a:xfrm>
           <a:prstGeom prst="rect">
             <a:avLst/>
@@ -5879,19 +5891,16 @@
               <a:lnSpc>
                 <a:spcPct val="100000"/>
               </a:lnSpc>
-              <a:spcBef>
-                <a:spcPts val="0"/>
-              </a:spcBef>
               <a:spcAft>
                 <a:spcPts val="0"/>
               </a:spcAft>
             </a:pPr>
             <a:r>
-              <a:rPr sz="1100" b="1" i="0">
+              <a:rPr sz="1050" b="1" i="0">
                 <a:solidFill>
-                  <a:srgbClr val="5A5F66"/>
+                  <a:srgbClr val="55554E"/>
                 </a:solidFill>
-                <a:latin typeface="Helvetica Neue"/>
+                <a:latin typeface="Graphik"/>
               </a:rPr>
               <a:t>TESTO DEL MODULO</a:t>
             </a:r>
@@ -5906,8 +5915,8 @@
         </p:nvSpPr>
         <p:spPr>
           <a:xfrm>
-            <a:off x="1234440" y="2514600"/>
-            <a:ext cx="4297680" cy="822960"/>
+            <a:off x="1216152" y="2514600"/>
+            <a:ext cx="4114800" cy="822960"/>
           </a:xfrm>
           <a:prstGeom prst="rect">
             <a:avLst/>
@@ -5924,321 +5933,25 @@
               <a:lnSpc>
                 <a:spcPct val="120000"/>
               </a:lnSpc>
-              <a:spcBef>
-                <a:spcPts val="0"/>
-              </a:spcBef>
               <a:spcAft>
                 <a:spcPts val="0"/>
               </a:spcAft>
             </a:pPr>
             <a:r>
-              <a:rPr sz="1700" b="0" i="0">
+              <a:rPr sz="1650" b="0" i="0">
                 <a:solidFill>
-                  <a:srgbClr val="141416"/>
+                  <a:srgbClr val="000000"/>
                 </a:solidFill>
-                <a:latin typeface="Helvetica Neue"/>
+                <a:latin typeface="Graphik"/>
               </a:rPr>
               <a:t>Indirizzo di nuova dimora abituale — Via/Piazza</a:t>
             </a:r>
           </a:p>
         </p:txBody>
       </p:sp>
-      <p:sp>
-        <p:nvSpPr>
-          <p:cNvPr id="8" name="Right Arrow 7"/>
-          <p:cNvSpPr/>
-          <p:nvPr/>
-        </p:nvSpPr>
-        <p:spPr>
-          <a:xfrm>
-            <a:off x="5989320" y="2514600"/>
-            <a:ext cx="502920" cy="365760"/>
-          </a:xfrm>
-          <a:prstGeom prst="rightArrow">
-            <a:avLst/>
-          </a:prstGeom>
-          <a:solidFill>
-            <a:srgbClr val="004A8F"/>
-          </a:solidFill>
-          <a:ln>
-            <a:noFill/>
-          </a:ln>
-          <a:effectLst/>
-        </p:spPr>
-        <p:style>
-          <a:lnRef idx="1">
-            <a:schemeClr val="accent1"/>
-          </a:lnRef>
-          <a:fillRef idx="3">
-            <a:schemeClr val="accent1"/>
-          </a:fillRef>
-          <a:effectRef idx="2">
-            <a:schemeClr val="accent1"/>
-          </a:effectRef>
-          <a:fontRef idx="minor">
-            <a:schemeClr val="lt1"/>
-          </a:fontRef>
-        </p:style>
-        <p:txBody>
-          <a:bodyPr rtlCol="0" anchor="ctr"/>
-          <a:lstStyle/>
-          <a:p>
-            <a:pPr algn="ctr"/>
-          </a:p>
-        </p:txBody>
-      </p:sp>
-      <p:sp>
-        <p:nvSpPr>
-          <p:cNvPr id="9" name="Rounded Rectangle 8"/>
-          <p:cNvSpPr/>
-          <p:nvPr/>
-        </p:nvSpPr>
-        <p:spPr>
-          <a:xfrm>
-            <a:off x="6720840" y="1920240"/>
-            <a:ext cx="4526280" cy="1600200"/>
-          </a:xfrm>
-          <a:prstGeom prst="roundRect">
-            <a:avLst>
-              <a:gd name="adj" fmla="val 6000"/>
-            </a:avLst>
-          </a:prstGeom>
-          <a:solidFill>
-            <a:srgbClr val="004A8F"/>
-          </a:solidFill>
-          <a:ln>
-            <a:noFill/>
-          </a:ln>
-          <a:effectLst/>
-        </p:spPr>
-        <p:style>
-          <a:lnRef idx="1">
-            <a:schemeClr val="accent1"/>
-          </a:lnRef>
-          <a:fillRef idx="3">
-            <a:schemeClr val="accent1"/>
-          </a:fillRef>
-          <a:effectRef idx="2">
-            <a:schemeClr val="accent1"/>
-          </a:effectRef>
-          <a:fontRef idx="minor">
-            <a:schemeClr val="lt1"/>
-          </a:fontRef>
-        </p:style>
-        <p:txBody>
-          <a:bodyPr rtlCol="0" anchor="ctr"/>
-          <a:lstStyle/>
-          <a:p>
-            <a:pPr algn="ctr"/>
-          </a:p>
-        </p:txBody>
-      </p:sp>
-      <p:sp>
-        <p:nvSpPr>
-          <p:cNvPr id="10" name="TextBox 9"/>
-          <p:cNvSpPr txBox="1"/>
-          <p:nvPr/>
-        </p:nvSpPr>
-        <p:spPr>
-          <a:xfrm>
-            <a:off x="7040880" y="2148840"/>
-            <a:ext cx="3931920" cy="274320"/>
-          </a:xfrm>
-          <a:prstGeom prst="rect">
-            <a:avLst/>
-          </a:prstGeom>
-          <a:noFill/>
-        </p:spPr>
-        <p:txBody>
-          <a:bodyPr wrap="square" anchor="t" lIns="0" rIns="0" tIns="0" bIns="0">
-            <a:spAutoFit/>
-          </a:bodyPr>
-          <a:lstStyle/>
-          <a:p>
-            <a:pPr algn="l">
-              <a:lnSpc>
-                <a:spcPct val="100000"/>
-              </a:lnSpc>
-              <a:spcBef>
-                <a:spcPts val="0"/>
-              </a:spcBef>
-              <a:spcAft>
-                <a:spcPts val="0"/>
-              </a:spcAft>
-            </a:pPr>
-            <a:r>
-              <a:rPr sz="1100" b="1" i="0">
-                <a:solidFill>
-                  <a:srgbClr val="2E7CC4"/>
-                </a:solidFill>
-                <a:latin typeface="Helvetica Neue"/>
-              </a:rPr>
-              <a:t>LA DOMANDA CHE LEGGE LA PERSONA</a:t>
-            </a:r>
-          </a:p>
-        </p:txBody>
-      </p:sp>
-      <p:sp>
-        <p:nvSpPr>
-          <p:cNvPr id="11" name="TextBox 10"/>
-          <p:cNvSpPr txBox="1"/>
-          <p:nvPr/>
-        </p:nvSpPr>
-        <p:spPr>
-          <a:xfrm>
-            <a:off x="7040880" y="2514600"/>
-            <a:ext cx="3931920" cy="822960"/>
-          </a:xfrm>
-          <a:prstGeom prst="rect">
-            <a:avLst/>
-          </a:prstGeom>
-          <a:noFill/>
-        </p:spPr>
-        <p:txBody>
-          <a:bodyPr wrap="square" anchor="t" lIns="0" rIns="0" tIns="0" bIns="0">
-            <a:spAutoFit/>
-          </a:bodyPr>
-          <a:lstStyle/>
-          <a:p>
-            <a:pPr algn="l">
-              <a:lnSpc>
-                <a:spcPct val="120000"/>
-              </a:lnSpc>
-              <a:spcBef>
-                <a:spcPts val="0"/>
-              </a:spcBef>
-              <a:spcAft>
-                <a:spcPts val="0"/>
-              </a:spcAft>
-            </a:pPr>
-            <a:r>
-              <a:rPr sz="1900" b="1" i="0">
-                <a:solidFill>
-                  <a:srgbClr val="FFFFFF"/>
-                </a:solidFill>
-                <a:latin typeface="Helvetica Neue"/>
-              </a:rPr>
-              <a:t>Qual è l'indirizzo della tua nuova casa?</a:t>
-            </a:r>
-          </a:p>
-        </p:txBody>
-      </p:sp>
-      <p:sp>
-        <p:nvSpPr>
-          <p:cNvPr id="12" name="TextBox 11"/>
-          <p:cNvSpPr txBox="1"/>
-          <p:nvPr/>
-        </p:nvSpPr>
-        <p:spPr>
-          <a:xfrm>
-            <a:off x="914400" y="3886200"/>
-            <a:ext cx="4846320" cy="1737360"/>
-          </a:xfrm>
-          <a:prstGeom prst="rect">
-            <a:avLst/>
-          </a:prstGeom>
-          <a:noFill/>
-        </p:spPr>
-        <p:txBody>
-          <a:bodyPr wrap="square" anchor="t" lIns="0" rIns="0" tIns="0" bIns="0">
-            <a:spAutoFit/>
-          </a:bodyPr>
-          <a:lstStyle/>
-          <a:p>
-            <a:pPr algn="l">
-              <a:lnSpc>
-                <a:spcPct val="100000"/>
-              </a:lnSpc>
-              <a:spcBef>
-                <a:spcPts val="0"/>
-              </a:spcBef>
-              <a:spcAft>
-                <a:spcPts val="800"/>
-              </a:spcAft>
-            </a:pPr>
-            <a:r>
-              <a:rPr sz="1700" b="1" i="0">
-                <a:solidFill>
-                  <a:srgbClr val="141416"/>
-                </a:solidFill>
-                <a:latin typeface="Helvetica Neue"/>
-              </a:rPr>
-              <a:t>Il testo originale resta sempre a schermo.</a:t>
-            </a:r>
-          </a:p>
-          <a:p>
-            <a:pPr algn="l">
-              <a:lnSpc>
-                <a:spcPct val="135000"/>
-              </a:lnSpc>
-              <a:spcBef>
-                <a:spcPts val="0"/>
-              </a:spcBef>
-              <a:spcAft>
-                <a:spcPts val="0"/>
-              </a:spcAft>
-            </a:pPr>
-            <a:r>
-              <a:rPr sz="1350" b="0" i="0">
-                <a:solidFill>
-                  <a:srgbClr val="5A5F66"/>
-                </a:solidFill>
-                <a:latin typeface="Helvetica Neue"/>
-              </a:rPr>
-              <a:t>La domanda semplice non sostituisce il modulo: lo affianca. Su un documento con valore legale, una semplificazione che altera il senso produce una dichiarazione sbagliata — e la responsabilità resta di chi firma.</a:t>
-            </a:r>
-          </a:p>
-        </p:txBody>
-      </p:sp>
-      <p:sp>
-        <p:nvSpPr>
-          <p:cNvPr id="13" name="Rectangle 12"/>
-          <p:cNvSpPr/>
-          <p:nvPr/>
-        </p:nvSpPr>
-        <p:spPr>
-          <a:xfrm>
-            <a:off x="6897385" y="3739514"/>
-            <a:ext cx="3761710" cy="2533650"/>
-          </a:xfrm>
-          <a:prstGeom prst="rect">
-            <a:avLst/>
-          </a:prstGeom>
-          <a:solidFill>
-            <a:srgbClr val="FFFFFF"/>
-          </a:solidFill>
-          <a:ln w="9525">
-            <a:solidFill>
-              <a:srgbClr val="D8D8D4"/>
-            </a:solidFill>
-          </a:ln>
-          <a:effectLst/>
-        </p:spPr>
-        <p:style>
-          <a:lnRef idx="1">
-            <a:schemeClr val="accent1"/>
-          </a:lnRef>
-          <a:fillRef idx="3">
-            <a:schemeClr val="accent1"/>
-          </a:fillRef>
-          <a:effectRef idx="2">
-            <a:schemeClr val="accent1"/>
-          </a:effectRef>
-          <a:fontRef idx="minor">
-            <a:schemeClr val="lt1"/>
-          </a:fontRef>
-        </p:style>
-        <p:txBody>
-          <a:bodyPr rtlCol="0" anchor="ctr"/>
-          <a:lstStyle/>
-          <a:p>
-            <a:pPr algn="ctr"/>
-          </a:p>
-        </p:txBody>
-      </p:sp>
       <p:pic>
         <p:nvPicPr>
-          <p:cNvPr id="14" name="Picture 13" descr="03-domanda-indirizzo.png"/>
+          <p:cNvPr id="8" name="Picture 7" descr="accenture-greater-than.png"/>
           <p:cNvPicPr>
             <a:picLocks noChangeAspect="1"/>
           </p:cNvPicPr>
@@ -6252,8 +5965,291 @@
         </p:blipFill>
         <p:spPr>
           <a:xfrm>
-            <a:off x="6906910" y="3749039"/>
-            <a:ext cx="3742660" cy="2514600"/>
+            <a:off x="5989320" y="2542032"/>
+            <a:ext cx="283491" cy="310896"/>
+          </a:xfrm>
+          <a:prstGeom prst="rect">
+            <a:avLst/>
+          </a:prstGeom>
+        </p:spPr>
+      </p:pic>
+      <p:sp>
+        <p:nvSpPr>
+          <p:cNvPr id="9" name="Rectangle 8"/>
+          <p:cNvSpPr/>
+          <p:nvPr/>
+        </p:nvSpPr>
+        <p:spPr>
+          <a:xfrm>
+            <a:off x="6675120" y="1920240"/>
+            <a:ext cx="4663440" cy="1554480"/>
+          </a:xfrm>
+          <a:prstGeom prst="rect">
+            <a:avLst/>
+          </a:prstGeom>
+          <a:solidFill>
+            <a:srgbClr val="A100FF"/>
+          </a:solidFill>
+          <a:ln>
+            <a:noFill/>
+          </a:ln>
+          <a:effectLst/>
+        </p:spPr>
+        <p:style>
+          <a:lnRef idx="1">
+            <a:schemeClr val="accent1"/>
+          </a:lnRef>
+          <a:fillRef idx="3">
+            <a:schemeClr val="accent1"/>
+          </a:fillRef>
+          <a:effectRef idx="2">
+            <a:schemeClr val="accent1"/>
+          </a:effectRef>
+          <a:fontRef idx="minor">
+            <a:schemeClr val="lt1"/>
+          </a:fontRef>
+        </p:style>
+        <p:txBody>
+          <a:bodyPr rtlCol="0" anchor="ctr"/>
+          <a:lstStyle/>
+          <a:p>
+            <a:pPr algn="ctr"/>
+          </a:p>
+        </p:txBody>
+      </p:sp>
+      <p:sp>
+        <p:nvSpPr>
+          <p:cNvPr id="10" name="TextBox 9"/>
+          <p:cNvSpPr txBox="1"/>
+          <p:nvPr/>
+        </p:nvSpPr>
+        <p:spPr>
+          <a:xfrm>
+            <a:off x="7022592" y="2148840"/>
+            <a:ext cx="4023360" cy="274320"/>
+          </a:xfrm>
+          <a:prstGeom prst="rect">
+            <a:avLst/>
+          </a:prstGeom>
+          <a:noFill/>
+        </p:spPr>
+        <p:txBody>
+          <a:bodyPr wrap="square" anchor="t" lIns="0" rIns="0" tIns="0" bIns="0">
+            <a:spAutoFit/>
+          </a:bodyPr>
+          <a:lstStyle/>
+          <a:p>
+            <a:pPr algn="l">
+              <a:lnSpc>
+                <a:spcPct val="100000"/>
+              </a:lnSpc>
+              <a:spcAft>
+                <a:spcPts val="0"/>
+              </a:spcAft>
+            </a:pPr>
+            <a:r>
+              <a:rPr sz="1050" b="1" i="0">
+                <a:solidFill>
+                  <a:srgbClr val="DCAFFF"/>
+                </a:solidFill>
+                <a:latin typeface="Graphik"/>
+              </a:rPr>
+              <a:t>LA DOMANDA CHE LEGGE LA PERSONA</a:t>
+            </a:r>
+          </a:p>
+        </p:txBody>
+      </p:sp>
+      <p:sp>
+        <p:nvSpPr>
+          <p:cNvPr id="11" name="TextBox 10"/>
+          <p:cNvSpPr txBox="1"/>
+          <p:nvPr/>
+        </p:nvSpPr>
+        <p:spPr>
+          <a:xfrm>
+            <a:off x="7022592" y="2514600"/>
+            <a:ext cx="4023360" cy="822960"/>
+          </a:xfrm>
+          <a:prstGeom prst="rect">
+            <a:avLst/>
+          </a:prstGeom>
+          <a:noFill/>
+        </p:spPr>
+        <p:txBody>
+          <a:bodyPr wrap="square" anchor="t" lIns="0" rIns="0" tIns="0" bIns="0">
+            <a:spAutoFit/>
+          </a:bodyPr>
+          <a:lstStyle/>
+          <a:p>
+            <a:pPr algn="l">
+              <a:lnSpc>
+                <a:spcPct val="120000"/>
+              </a:lnSpc>
+              <a:spcAft>
+                <a:spcPts val="0"/>
+              </a:spcAft>
+            </a:pPr>
+            <a:r>
+              <a:rPr sz="1850" b="1" i="0">
+                <a:solidFill>
+                  <a:srgbClr val="FFFFFF"/>
+                </a:solidFill>
+                <a:latin typeface="Graphik"/>
+              </a:rPr>
+              <a:t>Qual è l'indirizzo della tua nuova casa?</a:t>
+            </a:r>
+          </a:p>
+        </p:txBody>
+      </p:sp>
+      <p:sp>
+        <p:nvSpPr>
+          <p:cNvPr id="12" name="TextBox 11"/>
+          <p:cNvSpPr txBox="1"/>
+          <p:nvPr/>
+        </p:nvSpPr>
+        <p:spPr>
+          <a:xfrm>
+            <a:off x="868680" y="3886200"/>
+            <a:ext cx="4754880" cy="1828800"/>
+          </a:xfrm>
+          <a:prstGeom prst="rect">
+            <a:avLst/>
+          </a:prstGeom>
+          <a:noFill/>
+        </p:spPr>
+        <p:txBody>
+          <a:bodyPr wrap="square" anchor="t" lIns="0" rIns="0" tIns="0" bIns="0">
+            <a:spAutoFit/>
+          </a:bodyPr>
+          <a:lstStyle/>
+          <a:p>
+            <a:pPr algn="l">
+              <a:lnSpc>
+                <a:spcPct val="100000"/>
+              </a:lnSpc>
+              <a:spcAft>
+                <a:spcPts val="800"/>
+              </a:spcAft>
+            </a:pPr>
+            <a:r>
+              <a:rPr sz="1650" b="1" i="0">
+                <a:solidFill>
+                  <a:srgbClr val="000000"/>
+                </a:solidFill>
+                <a:latin typeface="Graphik"/>
+              </a:rPr>
+              <a:t>Il testo originale resta sempre a schermo.</a:t>
+            </a:r>
+          </a:p>
+          <a:p>
+            <a:pPr algn="l">
+              <a:lnSpc>
+                <a:spcPct val="135000"/>
+              </a:lnSpc>
+              <a:spcAft>
+                <a:spcPts val="0"/>
+              </a:spcAft>
+            </a:pPr>
+            <a:r>
+              <a:rPr sz="1300" b="0" i="0">
+                <a:solidFill>
+                  <a:srgbClr val="55554E"/>
+                </a:solidFill>
+                <a:latin typeface="Graphik"/>
+              </a:rPr>
+              <a:t>La domanda semplice non sostituisce il modulo: lo affianca. Su un documento con valore legale, una semplificazione che altera il senso produce una dichiarazione sbagliata — e la responsabilità resta di chi firma.</a:t>
+            </a:r>
+          </a:p>
+        </p:txBody>
+      </p:sp>
+      <p:sp>
+        <p:nvSpPr>
+          <p:cNvPr id="13" name="Rectangle 12"/>
+          <p:cNvSpPr/>
+          <p:nvPr/>
+        </p:nvSpPr>
+        <p:spPr>
+          <a:xfrm>
+            <a:off x="7068037" y="3739514"/>
+            <a:ext cx="3557565" cy="2396490"/>
+          </a:xfrm>
+          <a:prstGeom prst="rect">
+            <a:avLst/>
+          </a:prstGeom>
+          <a:solidFill>
+            <a:srgbClr val="FFFFFF"/>
+          </a:solidFill>
+          <a:ln w="12700">
+            <a:solidFill>
+              <a:srgbClr val="E6E6DC"/>
+            </a:solidFill>
+          </a:ln>
+          <a:effectLst/>
+        </p:spPr>
+        <p:style>
+          <a:lnRef idx="1">
+            <a:schemeClr val="accent1"/>
+          </a:lnRef>
+          <a:fillRef idx="3">
+            <a:schemeClr val="accent1"/>
+          </a:fillRef>
+          <a:effectRef idx="2">
+            <a:schemeClr val="accent1"/>
+          </a:effectRef>
+          <a:fontRef idx="minor">
+            <a:schemeClr val="lt1"/>
+          </a:fontRef>
+        </p:style>
+        <p:txBody>
+          <a:bodyPr rtlCol="0" anchor="ctr"/>
+          <a:lstStyle/>
+          <a:p>
+            <a:pPr algn="ctr"/>
+          </a:p>
+        </p:txBody>
+      </p:sp>
+      <p:pic>
+        <p:nvPicPr>
+          <p:cNvPr id="14" name="Picture 13" descr="03-domanda-indirizzo.png"/>
+          <p:cNvPicPr>
+            <a:picLocks noChangeAspect="1"/>
+          </p:cNvPicPr>
+          <p:nvPr/>
+        </p:nvPicPr>
+        <p:blipFill>
+          <a:blip r:embed="rId3"/>
+          <a:stretch>
+            <a:fillRect/>
+          </a:stretch>
+        </p:blipFill>
+        <p:spPr>
+          <a:xfrm>
+            <a:off x="7077562" y="3749039"/>
+            <a:ext cx="3538515" cy="2377440"/>
+          </a:xfrm>
+          <a:prstGeom prst="rect">
+            <a:avLst/>
+          </a:prstGeom>
+        </p:spPr>
+      </p:pic>
+      <p:pic>
+        <p:nvPicPr>
+          <p:cNvPr id="15" name="Picture 14" descr="accenture-technology-scuro.png"/>
+          <p:cNvPicPr>
+            <a:picLocks noChangeAspect="1"/>
+          </p:cNvPicPr>
+          <p:nvPr/>
+        </p:nvPicPr>
+        <p:blipFill>
+          <a:blip r:embed="rId4"/>
+          <a:stretch>
+            <a:fillRect/>
+          </a:stretch>
+        </p:blipFill>
+        <p:spPr>
+          <a:xfrm>
+            <a:off x="9933127" y="6254782"/>
+            <a:ext cx="1600200" cy="146018"/>
           </a:xfrm>
           <a:prstGeom prst="rect">
             <a:avLst/>
@@ -6330,8 +6326,8 @@
         </p:nvSpPr>
         <p:spPr>
           <a:xfrm>
-            <a:off x="914400" y="731520"/>
-            <a:ext cx="8229600" cy="274320"/>
+            <a:off x="868680" y="749808"/>
+            <a:ext cx="8229600" cy="256032"/>
           </a:xfrm>
           <a:prstGeom prst="rect">
             <a:avLst/>
@@ -6348,19 +6344,16 @@
               <a:lnSpc>
                 <a:spcPct val="100000"/>
               </a:lnSpc>
-              <a:spcBef>
-                <a:spcPts val="0"/>
-              </a:spcBef>
               <a:spcAft>
                 <a:spcPts val="0"/>
               </a:spcAft>
             </a:pPr>
             <a:r>
-              <a:rPr sz="1200" b="1" i="0">
+              <a:rPr sz="1150" b="1" i="0">
                 <a:solidFill>
-                  <a:srgbClr val="004A8F"/>
+                  <a:srgbClr val="A100FF"/>
                 </a:solidFill>
-                <a:latin typeface="Helvetica Neue"/>
+                <a:latin typeface="Graphik"/>
               </a:rPr>
               <a:t>IL RISULTATO</a:t>
             </a:r>
@@ -6375,8 +6368,8 @@
         </p:nvSpPr>
         <p:spPr>
           <a:xfrm>
-            <a:off x="914400" y="1078992"/>
-            <a:ext cx="5669280" cy="1280160"/>
+            <a:off x="868680" y="1097280"/>
+            <a:ext cx="5394960" cy="1280160"/>
           </a:xfrm>
           <a:prstGeom prst="rect">
             <a:avLst/>
@@ -6393,19 +6386,16 @@
               <a:lnSpc>
                 <a:spcPct val="115000"/>
               </a:lnSpc>
-              <a:spcBef>
-                <a:spcPts val="0"/>
-              </a:spcBef>
               <a:spcAft>
                 <a:spcPts val="0"/>
               </a:spcAft>
             </a:pPr>
             <a:r>
-              <a:rPr sz="3400" b="1" i="0">
+              <a:rPr sz="3300" b="1" i="0">
                 <a:solidFill>
-                  <a:srgbClr val="141416"/>
+                  <a:srgbClr val="000000"/>
                 </a:solidFill>
-                <a:latin typeface="Helvetica Neue"/>
+                <a:latin typeface="Graphik"/>
               </a:rPr>
               <a:t>Non una spiegazione.
 Il documento finito.</a:t>
@@ -6421,8 +6411,8 @@
         </p:nvSpPr>
         <p:spPr>
           <a:xfrm>
-            <a:off x="914400" y="2514600"/>
-            <a:ext cx="4937760" cy="2011680"/>
+            <a:off x="868680" y="2606040"/>
+            <a:ext cx="4846320" cy="1097280"/>
           </a:xfrm>
           <a:prstGeom prst="rect">
             <a:avLst/>
@@ -6439,114 +6429,41 @@
               <a:lnSpc>
                 <a:spcPct val="135000"/>
               </a:lnSpc>
-              <a:spcBef>
-                <a:spcPts val="0"/>
-              </a:spcBef>
-              <a:spcAft>
-                <a:spcPts val="1400"/>
-              </a:spcAft>
-            </a:pPr>
-            <a:r>
-              <a:rPr sz="1500" b="0" i="0">
-                <a:solidFill>
-                  <a:srgbClr val="5A5F66"/>
-                </a:solidFill>
-                <a:latin typeface="Helvetica Neue"/>
-              </a:rPr>
-              <a:t>Le risposte finiscono nei campi giusti del PDF originale, che viene restituito compilato e pronto.</a:t>
-            </a:r>
-          </a:p>
-          <a:p>
-            <a:pPr algn="l">
-              <a:lnSpc>
-                <a:spcPct val="130000"/>
-              </a:lnSpc>
-              <a:spcBef>
-                <a:spcPts val="0"/>
-              </a:spcBef>
               <a:spcAft>
                 <a:spcPts val="0"/>
               </a:spcAft>
             </a:pPr>
             <a:r>
-              <a:rPr sz="1600" b="1" i="0">
+              <a:rPr sz="1450" b="0" i="0">
                 <a:solidFill>
-                  <a:srgbClr val="1B7F4B"/>
+                  <a:srgbClr val="55554E"/>
                 </a:solidFill>
-                <a:latin typeface="Helvetica Neue"/>
+                <a:latin typeface="Graphik"/>
               </a:rPr>
-              <a:t>Prima: il modulo resta bianco.
-Dopo: il modulo è compilato.</a:t>
-            </a:r>
-          </a:p>
-        </p:txBody>
-      </p:sp>
-      <p:sp>
-        <p:nvSpPr>
-          <p:cNvPr id="6" name="TextBox 5"/>
-          <p:cNvSpPr txBox="1"/>
-          <p:nvPr/>
-        </p:nvSpPr>
-        <p:spPr>
-          <a:xfrm>
-            <a:off x="914400" y="5074920"/>
-            <a:ext cx="4937760" cy="731520"/>
-          </a:xfrm>
-          <a:prstGeom prst="rect">
-            <a:avLst/>
-          </a:prstGeom>
-          <a:noFill/>
-        </p:spPr>
-        <p:txBody>
-          <a:bodyPr wrap="square" anchor="t" lIns="0" rIns="0" tIns="0" bIns="0">
-            <a:spAutoFit/>
-          </a:bodyPr>
-          <a:lstStyle/>
-          <a:p>
-            <a:pPr algn="l">
-              <a:lnSpc>
-                <a:spcPct val="130000"/>
-              </a:lnSpc>
-              <a:spcBef>
-                <a:spcPts val="0"/>
-              </a:spcBef>
-              <a:spcAft>
-                <a:spcPts val="0"/>
-              </a:spcAft>
-            </a:pPr>
-            <a:r>
-              <a:rPr sz="1300" b="0" i="1">
-                <a:solidFill>
-                  <a:srgbClr val="5A5F66"/>
-                </a:solidFill>
-                <a:latin typeface="Helvetica Neue"/>
-              </a:rPr>
-              <a:t>Il guadagno è misurabile senza interpretazioni: o la pratica è completa, o non lo è.</a:t>
-            </a:r>
-          </a:p>
-        </p:txBody>
-      </p:sp>
-      <p:sp>
-        <p:nvSpPr>
-          <p:cNvPr id="7" name="Rectangle 6"/>
+              <a:t>Le risposte finiscono nei campi giusti del PDF originale, che viene restituito compilato e pronto.</a:t>
+            </a:r>
+          </a:p>
+        </p:txBody>
+      </p:sp>
+      <p:sp>
+        <p:nvSpPr>
+          <p:cNvPr id="6" name="Rectangle 5"/>
           <p:cNvSpPr/>
           <p:nvPr/>
         </p:nvSpPr>
         <p:spPr>
           <a:xfrm>
-            <a:off x="6208395" y="1919341"/>
-            <a:ext cx="5139690" cy="3110757"/>
+            <a:off x="868680" y="3794760"/>
+            <a:ext cx="4846320" cy="1051560"/>
           </a:xfrm>
           <a:prstGeom prst="rect">
             <a:avLst/>
           </a:prstGeom>
           <a:solidFill>
-            <a:srgbClr val="FFFFFF"/>
+            <a:srgbClr val="E6E6DC"/>
           </a:solidFill>
-          <a:ln w="9525">
-            <a:solidFill>
-              <a:srgbClr val="D8D8D4"/>
-            </a:solidFill>
+          <a:ln>
+            <a:noFill/>
           </a:ln>
           <a:effectLst/>
         </p:spPr>
@@ -6572,9 +6489,184 @@
           </a:p>
         </p:txBody>
       </p:sp>
+      <p:sp>
+        <p:nvSpPr>
+          <p:cNvPr id="7" name="Rectangle 6"/>
+          <p:cNvSpPr/>
+          <p:nvPr/>
+        </p:nvSpPr>
+        <p:spPr>
+          <a:xfrm>
+            <a:off x="868680" y="3794760"/>
+            <a:ext cx="50800" cy="1051560"/>
+          </a:xfrm>
+          <a:prstGeom prst="rect">
+            <a:avLst/>
+          </a:prstGeom>
+          <a:solidFill>
+            <a:srgbClr val="A100FF"/>
+          </a:solidFill>
+          <a:ln>
+            <a:noFill/>
+          </a:ln>
+          <a:effectLst/>
+        </p:spPr>
+        <p:style>
+          <a:lnRef idx="1">
+            <a:schemeClr val="accent1"/>
+          </a:lnRef>
+          <a:fillRef idx="3">
+            <a:schemeClr val="accent1"/>
+          </a:fillRef>
+          <a:effectRef idx="2">
+            <a:schemeClr val="accent1"/>
+          </a:effectRef>
+          <a:fontRef idx="minor">
+            <a:schemeClr val="lt1"/>
+          </a:fontRef>
+        </p:style>
+        <p:txBody>
+          <a:bodyPr rtlCol="0" anchor="ctr"/>
+          <a:lstStyle/>
+          <a:p>
+            <a:pPr algn="ctr"/>
+          </a:p>
+        </p:txBody>
+      </p:sp>
+      <p:sp>
+        <p:nvSpPr>
+          <p:cNvPr id="8" name="TextBox 7"/>
+          <p:cNvSpPr txBox="1"/>
+          <p:nvPr/>
+        </p:nvSpPr>
+        <p:spPr>
+          <a:xfrm>
+            <a:off x="1216152" y="4041648"/>
+            <a:ext cx="4206240" cy="640080"/>
+          </a:xfrm>
+          <a:prstGeom prst="rect">
+            <a:avLst/>
+          </a:prstGeom>
+          <a:noFill/>
+        </p:spPr>
+        <p:txBody>
+          <a:bodyPr wrap="square" anchor="t" lIns="0" rIns="0" tIns="0" bIns="0">
+            <a:spAutoFit/>
+          </a:bodyPr>
+          <a:lstStyle/>
+          <a:p>
+            <a:pPr algn="l">
+              <a:lnSpc>
+                <a:spcPct val="130000"/>
+              </a:lnSpc>
+              <a:spcAft>
+                <a:spcPts val="0"/>
+              </a:spcAft>
+            </a:pPr>
+            <a:r>
+              <a:rPr sz="1550" b="1" i="0">
+                <a:solidFill>
+                  <a:srgbClr val="000000"/>
+                </a:solidFill>
+                <a:latin typeface="Graphik"/>
+              </a:rPr>
+              <a:t>Prima: il modulo resta bianco.
+Dopo: il modulo è compilato.</a:t>
+            </a:r>
+          </a:p>
+        </p:txBody>
+      </p:sp>
+      <p:sp>
+        <p:nvSpPr>
+          <p:cNvPr id="9" name="TextBox 8"/>
+          <p:cNvSpPr txBox="1"/>
+          <p:nvPr/>
+        </p:nvSpPr>
+        <p:spPr>
+          <a:xfrm>
+            <a:off x="868680" y="5120640"/>
+            <a:ext cx="4846320" cy="731520"/>
+          </a:xfrm>
+          <a:prstGeom prst="rect">
+            <a:avLst/>
+          </a:prstGeom>
+          <a:noFill/>
+        </p:spPr>
+        <p:txBody>
+          <a:bodyPr wrap="square" anchor="t" lIns="0" rIns="0" tIns="0" bIns="0">
+            <a:spAutoFit/>
+          </a:bodyPr>
+          <a:lstStyle/>
+          <a:p>
+            <a:pPr algn="l">
+              <a:lnSpc>
+                <a:spcPct val="130000"/>
+              </a:lnSpc>
+              <a:spcAft>
+                <a:spcPts val="0"/>
+              </a:spcAft>
+            </a:pPr>
+            <a:r>
+              <a:rPr sz="1250" b="0" i="1">
+                <a:solidFill>
+                  <a:srgbClr val="55554E"/>
+                </a:solidFill>
+                <a:latin typeface="Graphik"/>
+              </a:rPr>
+              <a:t>Il guadagno è misurabile senza interpretazioni: o la pratica è completa, o non lo è.</a:t>
+            </a:r>
+          </a:p>
+        </p:txBody>
+      </p:sp>
+      <p:sp>
+        <p:nvSpPr>
+          <p:cNvPr id="10" name="Rectangle 9"/>
+          <p:cNvSpPr/>
+          <p:nvPr/>
+        </p:nvSpPr>
+        <p:spPr>
+          <a:xfrm>
+            <a:off x="6208395" y="1873621"/>
+            <a:ext cx="5139690" cy="3110757"/>
+          </a:xfrm>
+          <a:prstGeom prst="rect">
+            <a:avLst/>
+          </a:prstGeom>
+          <a:solidFill>
+            <a:srgbClr val="FFFFFF"/>
+          </a:solidFill>
+          <a:ln w="12700">
+            <a:solidFill>
+              <a:srgbClr val="E6E6DC"/>
+            </a:solidFill>
+          </a:ln>
+          <a:effectLst/>
+        </p:spPr>
+        <p:style>
+          <a:lnRef idx="1">
+            <a:schemeClr val="accent1"/>
+          </a:lnRef>
+          <a:fillRef idx="3">
+            <a:schemeClr val="accent1"/>
+          </a:fillRef>
+          <a:effectRef idx="2">
+            <a:schemeClr val="accent1"/>
+          </a:effectRef>
+          <a:fontRef idx="minor">
+            <a:schemeClr val="lt1"/>
+          </a:fontRef>
+        </p:style>
+        <p:txBody>
+          <a:bodyPr rtlCol="0" anchor="ctr"/>
+          <a:lstStyle/>
+          <a:p>
+            <a:pPr algn="ctr"/>
+          </a:p>
+        </p:txBody>
+      </p:sp>
       <p:pic>
         <p:nvPicPr>
-          <p:cNvPr id="8" name="Picture 7" descr="pdf-compilato-crop.png"/>
+          <p:cNvPr id="11" name="Picture 10" descr="pdf-compilato-crop.png"/>
           <p:cNvPicPr>
             <a:picLocks noChangeAspect="1"/>
           </p:cNvPicPr>
@@ -6588,8 +6680,32 @@
         </p:blipFill>
         <p:spPr>
           <a:xfrm>
-            <a:off x="6217920" y="1928866"/>
+            <a:off x="6217920" y="1883146"/>
             <a:ext cx="5120640" cy="3091707"/>
+          </a:xfrm>
+          <a:prstGeom prst="rect">
+            <a:avLst/>
+          </a:prstGeom>
+        </p:spPr>
+      </p:pic>
+      <p:pic>
+        <p:nvPicPr>
+          <p:cNvPr id="12" name="Picture 11" descr="accenture-technology-scuro.png"/>
+          <p:cNvPicPr>
+            <a:picLocks noChangeAspect="1"/>
+          </p:cNvPicPr>
+          <p:nvPr/>
+        </p:nvPicPr>
+        <p:blipFill>
+          <a:blip r:embed="rId3"/>
+          <a:stretch>
+            <a:fillRect/>
+          </a:stretch>
+        </p:blipFill>
+        <p:spPr>
+          <a:xfrm>
+            <a:off x="9933127" y="6254782"/>
+            <a:ext cx="1600200" cy="146018"/>
           </a:xfrm>
           <a:prstGeom prst="rect">
             <a:avLst/>
@@ -6629,7 +6745,7 @@
             <a:avLst/>
           </a:prstGeom>
           <a:solidFill>
-            <a:srgbClr val="F7F7F5"/>
+            <a:srgbClr val="E6E6DC"/>
           </a:solidFill>
           <a:ln>
             <a:noFill/>
@@ -6666,8 +6782,8 @@
         </p:nvSpPr>
         <p:spPr>
           <a:xfrm>
-            <a:off x="914400" y="685800"/>
-            <a:ext cx="8229600" cy="274320"/>
+            <a:off x="868680" y="731520"/>
+            <a:ext cx="8229600" cy="256032"/>
           </a:xfrm>
           <a:prstGeom prst="rect">
             <a:avLst/>
@@ -6684,19 +6800,16 @@
               <a:lnSpc>
                 <a:spcPct val="100000"/>
               </a:lnSpc>
-              <a:spcBef>
-                <a:spcPts val="0"/>
-              </a:spcBef>
               <a:spcAft>
                 <a:spcPts val="0"/>
               </a:spcAft>
             </a:pPr>
             <a:r>
-              <a:rPr sz="1200" b="1" i="0">
+              <a:rPr sz="1150" b="1" i="0">
                 <a:solidFill>
-                  <a:srgbClr val="004A8F"/>
+                  <a:srgbClr val="A100FF"/>
                 </a:solidFill>
-                <a:latin typeface="Helvetica Neue"/>
+                <a:latin typeface="Graphik"/>
               </a:rPr>
               <a:t>COME È FATTO</a:t>
             </a:r>
@@ -6711,8 +6824,8 @@
         </p:nvSpPr>
         <p:spPr>
           <a:xfrm>
-            <a:off x="914400" y="1024128"/>
-            <a:ext cx="10332720" cy="640080"/>
+            <a:off x="868680" y="1051560"/>
+            <a:ext cx="10469880" cy="640080"/>
           </a:xfrm>
           <a:prstGeom prst="rect">
             <a:avLst/>
@@ -6729,48 +6842,41 @@
               <a:lnSpc>
                 <a:spcPct val="100000"/>
               </a:lnSpc>
-              <a:spcBef>
-                <a:spcPts val="0"/>
-              </a:spcBef>
               <a:spcAft>
                 <a:spcPts val="0"/>
               </a:spcAft>
             </a:pPr>
             <a:r>
-              <a:rPr sz="3400" b="1" i="0">
+              <a:rPr sz="3300" b="1" i="0">
                 <a:solidFill>
-                  <a:srgbClr val="141416"/>
+                  <a:srgbClr val="000000"/>
                 </a:solidFill>
-                <a:latin typeface="Helvetica Neue"/>
+                <a:latin typeface="Graphik"/>
               </a:rPr>
-              <a:t>Tre pezzi, nessuna dipendenza esterna</a:t>
-            </a:r>
-          </a:p>
-        </p:txBody>
-      </p:sp>
-      <p:sp>
-        <p:nvSpPr>
-          <p:cNvPr id="5" name="Rounded Rectangle 4"/>
+              <a:t>Tre pezzi, nessun servizio esterno</a:t>
+            </a:r>
+          </a:p>
+        </p:txBody>
+      </p:sp>
+      <p:sp>
+        <p:nvSpPr>
+          <p:cNvPr id="5" name="Rectangle 4"/>
           <p:cNvSpPr/>
           <p:nvPr/>
         </p:nvSpPr>
         <p:spPr>
           <a:xfrm>
-            <a:off x="914400" y="1965960"/>
-            <a:ext cx="3108960" cy="2331720"/>
-          </a:xfrm>
-          <a:prstGeom prst="roundRect">
-            <a:avLst>
-              <a:gd name="adj" fmla="val 6000"/>
-            </a:avLst>
+            <a:off x="868680" y="1965960"/>
+            <a:ext cx="3108960" cy="2286000"/>
+          </a:xfrm>
+          <a:prstGeom prst="rect">
+            <a:avLst/>
           </a:prstGeom>
           <a:solidFill>
             <a:srgbClr val="FFFFFF"/>
           </a:solidFill>
-          <a:ln w="12700">
-            <a:solidFill>
-              <a:srgbClr val="DDDDD9"/>
-            </a:solidFill>
+          <a:ln>
+            <a:noFill/>
           </a:ln>
           <a:effectLst/>
         </p:spPr>
@@ -6804,14 +6910,14 @@
         </p:nvSpPr>
         <p:spPr>
           <a:xfrm>
-            <a:off x="914400" y="1965960"/>
+            <a:off x="868680" y="1965960"/>
             <a:ext cx="3108960" cy="50800"/>
           </a:xfrm>
           <a:prstGeom prst="rect">
             <a:avLst/>
           </a:prstGeom>
           <a:solidFill>
-            <a:srgbClr val="004A8F"/>
+            <a:srgbClr val="A100FF"/>
           </a:solidFill>
           <a:ln>
             <a:noFill/>
@@ -6848,8 +6954,8 @@
         </p:nvSpPr>
         <p:spPr>
           <a:xfrm>
-            <a:off x="1188720" y="2286000"/>
-            <a:ext cx="2560320" cy="274320"/>
+            <a:off x="1161288" y="2286000"/>
+            <a:ext cx="2514600" cy="274320"/>
           </a:xfrm>
           <a:prstGeom prst="rect">
             <a:avLst/>
@@ -6866,19 +6972,16 @@
               <a:lnSpc>
                 <a:spcPct val="100000"/>
               </a:lnSpc>
-              <a:spcBef>
-                <a:spcPts val="0"/>
-              </a:spcBef>
               <a:spcAft>
                 <a:spcPts val="0"/>
               </a:spcAft>
             </a:pPr>
             <a:r>
-              <a:rPr sz="1050" b="1" i="0">
+              <a:rPr sz="1000" b="1" i="0">
                 <a:solidFill>
-                  <a:srgbClr val="004A8F"/>
+                  <a:srgbClr val="A100FF"/>
                 </a:solidFill>
-                <a:latin typeface="Helvetica Neue"/>
+                <a:latin typeface="Graphik"/>
               </a:rPr>
               <a:t>FRONTEND</a:t>
             </a:r>
@@ -6893,8 +6996,8 @@
         </p:nvSpPr>
         <p:spPr>
           <a:xfrm>
-            <a:off x="1188720" y="2606040"/>
-            <a:ext cx="2560320" cy="457200"/>
+            <a:off x="1161288" y="2606040"/>
+            <a:ext cx="2514600" cy="457200"/>
           </a:xfrm>
           <a:prstGeom prst="rect">
             <a:avLst/>
@@ -6911,19 +7014,16 @@
               <a:lnSpc>
                 <a:spcPct val="100000"/>
               </a:lnSpc>
-              <a:spcBef>
-                <a:spcPts val="0"/>
-              </a:spcBef>
               <a:spcAft>
                 <a:spcPts val="0"/>
               </a:spcAft>
             </a:pPr>
             <a:r>
-              <a:rPr sz="1800" b="1" i="0">
+              <a:rPr sz="1700" b="1" i="0">
                 <a:solidFill>
-                  <a:srgbClr val="141416"/>
+                  <a:srgbClr val="000000"/>
                 </a:solidFill>
-                <a:latin typeface="Helvetica Neue"/>
+                <a:latin typeface="Graphik"/>
               </a:rPr>
               <a:t>Angular 21</a:t>
             </a:r>
@@ -6938,8 +7038,8 @@
         </p:nvSpPr>
         <p:spPr>
           <a:xfrm>
-            <a:off x="1188720" y="3200400"/>
-            <a:ext cx="2560320" cy="1005840"/>
+            <a:off x="1161288" y="3200400"/>
+            <a:ext cx="2514600" cy="914400"/>
           </a:xfrm>
           <a:prstGeom prst="rect">
             <a:avLst/>
@@ -6956,49 +7056,41 @@
               <a:lnSpc>
                 <a:spcPct val="130000"/>
               </a:lnSpc>
-              <a:spcBef>
-                <a:spcPts val="0"/>
-              </a:spcBef>
               <a:spcAft>
                 <a:spcPts val="0"/>
               </a:spcAft>
             </a:pPr>
             <a:r>
-              <a:rPr sz="1300" b="0" i="0">
+              <a:rPr sz="1250" b="0" i="0">
                 <a:solidFill>
-                  <a:srgbClr val="5A5F66"/>
+                  <a:srgbClr val="55554E"/>
                 </a:solidFill>
-                <a:latin typeface="Helvetica Neue"/>
+                <a:latin typeface="Graphik"/>
               </a:rPr>
-              <a:t>Due schermate: carica e rispondi.
-Testo grande, un campo per volta, navigabile da tastiera.</a:t>
-            </a:r>
-          </a:p>
-        </p:txBody>
-      </p:sp>
-      <p:sp>
-        <p:nvSpPr>
-          <p:cNvPr id="10" name="Rounded Rectangle 9"/>
+              <a:t>Due schermate: carica e rispondi. Testo grande, un campo per volta, navigabile da tastiera.</a:t>
+            </a:r>
+          </a:p>
+        </p:txBody>
+      </p:sp>
+      <p:sp>
+        <p:nvSpPr>
+          <p:cNvPr id="10" name="Rectangle 9"/>
           <p:cNvSpPr/>
           <p:nvPr/>
         </p:nvSpPr>
         <p:spPr>
           <a:xfrm>
-            <a:off x="4434840" y="1965960"/>
-            <a:ext cx="3108960" cy="2331720"/>
-          </a:xfrm>
-          <a:prstGeom prst="roundRect">
-            <a:avLst>
-              <a:gd name="adj" fmla="val 6000"/>
-            </a:avLst>
+            <a:off x="4462272" y="1965960"/>
+            <a:ext cx="3108960" cy="2286000"/>
+          </a:xfrm>
+          <a:prstGeom prst="rect">
+            <a:avLst/>
           </a:prstGeom>
           <a:solidFill>
             <a:srgbClr val="FFFFFF"/>
           </a:solidFill>
-          <a:ln w="12700">
-            <a:solidFill>
-              <a:srgbClr val="DDDDD9"/>
-            </a:solidFill>
+          <a:ln>
+            <a:noFill/>
           </a:ln>
           <a:effectLst/>
         </p:spPr>
@@ -7032,14 +7124,14 @@
         </p:nvSpPr>
         <p:spPr>
           <a:xfrm>
-            <a:off x="4434840" y="1965960"/>
+            <a:off x="4462272" y="1965960"/>
             <a:ext cx="3108960" cy="50800"/>
           </a:xfrm>
           <a:prstGeom prst="rect">
             <a:avLst/>
           </a:prstGeom>
           <a:solidFill>
-            <a:srgbClr val="004A8F"/>
+            <a:srgbClr val="7500C0"/>
           </a:solidFill>
           <a:ln>
             <a:noFill/>
@@ -7076,8 +7168,8 @@
         </p:nvSpPr>
         <p:spPr>
           <a:xfrm>
-            <a:off x="4709160" y="2286000"/>
-            <a:ext cx="2560320" cy="274320"/>
+            <a:off x="4754880" y="2286000"/>
+            <a:ext cx="2514600" cy="274320"/>
           </a:xfrm>
           <a:prstGeom prst="rect">
             <a:avLst/>
@@ -7094,19 +7186,16 @@
               <a:lnSpc>
                 <a:spcPct val="100000"/>
               </a:lnSpc>
-              <a:spcBef>
-                <a:spcPts val="0"/>
-              </a:spcBef>
               <a:spcAft>
                 <a:spcPts val="0"/>
               </a:spcAft>
             </a:pPr>
             <a:r>
-              <a:rPr sz="1050" b="1" i="0">
+              <a:rPr sz="1000" b="1" i="0">
                 <a:solidFill>
-                  <a:srgbClr val="004A8F"/>
+                  <a:srgbClr val="7500C0"/>
                 </a:solidFill>
-                <a:latin typeface="Helvetica Neue"/>
+                <a:latin typeface="Graphik"/>
               </a:rPr>
               <a:t>BACKEND</a:t>
             </a:r>
@@ -7121,8 +7210,8 @@
         </p:nvSpPr>
         <p:spPr>
           <a:xfrm>
-            <a:off x="4709160" y="2606040"/>
-            <a:ext cx="2560320" cy="457200"/>
+            <a:off x="4754880" y="2606040"/>
+            <a:ext cx="2514600" cy="457200"/>
           </a:xfrm>
           <a:prstGeom prst="rect">
             <a:avLst/>
@@ -7139,19 +7228,16 @@
               <a:lnSpc>
                 <a:spcPct val="100000"/>
               </a:lnSpc>
-              <a:spcBef>
-                <a:spcPts val="0"/>
-              </a:spcBef>
               <a:spcAft>
                 <a:spcPts val="0"/>
               </a:spcAft>
             </a:pPr>
             <a:r>
-              <a:rPr sz="1800" b="1" i="0">
+              <a:rPr sz="1700" b="1" i="0">
                 <a:solidFill>
-                  <a:srgbClr val="141416"/>
+                  <a:srgbClr val="000000"/>
                 </a:solidFill>
-                <a:latin typeface="Helvetica Neue"/>
+                <a:latin typeface="Graphik"/>
               </a:rPr>
               <a:t>Spring Boot · Java 21</a:t>
             </a:r>
@@ -7166,8 +7252,8 @@
         </p:nvSpPr>
         <p:spPr>
           <a:xfrm>
-            <a:off x="4709160" y="3200400"/>
-            <a:ext cx="2560320" cy="1005840"/>
+            <a:off x="4754880" y="3200400"/>
+            <a:ext cx="2514600" cy="914400"/>
           </a:xfrm>
           <a:prstGeom prst="rect">
             <a:avLst/>
@@ -7184,19 +7270,16 @@
               <a:lnSpc>
                 <a:spcPct val="130000"/>
               </a:lnSpc>
-              <a:spcBef>
-                <a:spcPts val="0"/>
-              </a:spcBef>
               <a:spcAft>
                 <a:spcPts val="0"/>
               </a:spcAft>
             </a:pPr>
             <a:r>
-              <a:rPr sz="1300" b="0" i="0">
+              <a:rPr sz="1250" b="0" i="0">
                 <a:solidFill>
-                  <a:srgbClr val="5A5F66"/>
+                  <a:srgbClr val="55554E"/>
                 </a:solidFill>
-                <a:latin typeface="Helvetica Neue"/>
+                <a:latin typeface="Graphik"/>
               </a:rPr>
               <a:t>Legge i campi del PDF, orchestra le domande, riscrive il modulo compilato con Apache PDFBox.</a:t>
             </a:r>
@@ -7205,27 +7288,23 @@
       </p:sp>
       <p:sp>
         <p:nvSpPr>
-          <p:cNvPr id="15" name="Rounded Rectangle 14"/>
+          <p:cNvPr id="15" name="Rectangle 14"/>
           <p:cNvSpPr/>
           <p:nvPr/>
         </p:nvSpPr>
         <p:spPr>
           <a:xfrm>
-            <a:off x="7955279" y="1965960"/>
-            <a:ext cx="3108960" cy="2331720"/>
-          </a:xfrm>
-          <a:prstGeom prst="roundRect">
-            <a:avLst>
-              <a:gd name="adj" fmla="val 6000"/>
-            </a:avLst>
+            <a:off x="8055864" y="1965960"/>
+            <a:ext cx="3108960" cy="2286000"/>
+          </a:xfrm>
+          <a:prstGeom prst="rect">
+            <a:avLst/>
           </a:prstGeom>
           <a:solidFill>
             <a:srgbClr val="FFFFFF"/>
           </a:solidFill>
-          <a:ln w="12700">
-            <a:solidFill>
-              <a:srgbClr val="DDDDD9"/>
-            </a:solidFill>
+          <a:ln>
+            <a:noFill/>
           </a:ln>
           <a:effectLst/>
         </p:spPr>
@@ -7259,14 +7338,14 @@
         </p:nvSpPr>
         <p:spPr>
           <a:xfrm>
-            <a:off x="7955279" y="1965960"/>
+            <a:off x="8055864" y="1965960"/>
             <a:ext cx="3108960" cy="50800"/>
           </a:xfrm>
           <a:prstGeom prst="rect">
             <a:avLst/>
           </a:prstGeom>
           <a:solidFill>
-            <a:srgbClr val="1B7F4B"/>
+            <a:srgbClr val="460073"/>
           </a:solidFill>
           <a:ln>
             <a:noFill/>
@@ -7303,8 +7382,8 @@
         </p:nvSpPr>
         <p:spPr>
           <a:xfrm>
-            <a:off x="8229599" y="2286000"/>
-            <a:ext cx="2560320" cy="274320"/>
+            <a:off x="8348472" y="2286000"/>
+            <a:ext cx="2514600" cy="274320"/>
           </a:xfrm>
           <a:prstGeom prst="rect">
             <a:avLst/>
@@ -7321,19 +7400,16 @@
               <a:lnSpc>
                 <a:spcPct val="100000"/>
               </a:lnSpc>
-              <a:spcBef>
-                <a:spcPts val="0"/>
-              </a:spcBef>
               <a:spcAft>
                 <a:spcPts val="0"/>
               </a:spcAft>
             </a:pPr>
             <a:r>
-              <a:rPr sz="1050" b="1" i="0">
+              <a:rPr sz="1000" b="1" i="0">
                 <a:solidFill>
-                  <a:srgbClr val="1B7F4B"/>
+                  <a:srgbClr val="460073"/>
                 </a:solidFill>
-                <a:latin typeface="Helvetica Neue"/>
+                <a:latin typeface="Graphik"/>
               </a:rPr>
               <a:t>MOTORE LINGUISTICO</a:t>
             </a:r>
@@ -7348,8 +7424,8 @@
         </p:nvSpPr>
         <p:spPr>
           <a:xfrm>
-            <a:off x="8229599" y="2606040"/>
-            <a:ext cx="2560320" cy="457200"/>
+            <a:off x="8348472" y="2606040"/>
+            <a:ext cx="2514600" cy="457200"/>
           </a:xfrm>
           <a:prstGeom prst="rect">
             <a:avLst/>
@@ -7366,21 +7442,18 @@
               <a:lnSpc>
                 <a:spcPct val="100000"/>
               </a:lnSpc>
-              <a:spcBef>
-                <a:spcPts val="0"/>
-              </a:spcBef>
               <a:spcAft>
                 <a:spcPts val="0"/>
               </a:spcAft>
             </a:pPr>
             <a:r>
-              <a:rPr sz="1800" b="1" i="0">
+              <a:rPr sz="1700" b="1" i="0">
                 <a:solidFill>
-                  <a:srgbClr val="141416"/>
+                  <a:srgbClr val="000000"/>
                 </a:solidFill>
-                <a:latin typeface="Helvetica Neue"/>
+                <a:latin typeface="Graphik"/>
               </a:rPr>
-              <a:t>Ollama · qwen2.5 in locale</a:t>
+              <a:t>Ollama · qwen2.5 locale</a:t>
             </a:r>
           </a:p>
         </p:txBody>
@@ -7393,8 +7466,8 @@
         </p:nvSpPr>
         <p:spPr>
           <a:xfrm>
-            <a:off x="8229599" y="3200400"/>
-            <a:ext cx="2560320" cy="1005840"/>
+            <a:off x="8348472" y="3200400"/>
+            <a:ext cx="2514600" cy="914400"/>
           </a:xfrm>
           <a:prstGeom prst="rect">
             <a:avLst/>
@@ -7411,19 +7484,16 @@
               <a:lnSpc>
                 <a:spcPct val="130000"/>
               </a:lnSpc>
-              <a:spcBef>
-                <a:spcPts val="0"/>
-              </a:spcBef>
               <a:spcAft>
                 <a:spcPts val="0"/>
               </a:spcAft>
             </a:pPr>
             <a:r>
-              <a:rPr sz="1300" b="0" i="0">
+              <a:rPr sz="1250" b="0" i="0">
                 <a:solidFill>
-                  <a:srgbClr val="5A5F66"/>
+                  <a:srgbClr val="55554E"/>
                 </a:solidFill>
-                <a:latin typeface="Helvetica Neue"/>
+                <a:latin typeface="Graphik"/>
               </a:rPr>
               <a:t>Trasforma l'etichetta burocratica in una domanda semplice. Gira sulla macchina, non nel cloud.</a:t>
             </a:r>
@@ -7432,22 +7502,20 @@
       </p:sp>
       <p:sp>
         <p:nvSpPr>
-          <p:cNvPr id="20" name="Rounded Rectangle 19"/>
+          <p:cNvPr id="20" name="Rectangle 19"/>
           <p:cNvSpPr/>
           <p:nvPr/>
         </p:nvSpPr>
         <p:spPr>
           <a:xfrm>
-            <a:off x="914400" y="4709160"/>
-            <a:ext cx="10332720" cy="1234440"/>
-          </a:xfrm>
-          <a:prstGeom prst="roundRect">
-            <a:avLst>
-              <a:gd name="adj" fmla="val 6000"/>
-            </a:avLst>
+            <a:off x="868680" y="4709160"/>
+            <a:ext cx="10469880" cy="1188720"/>
+          </a:xfrm>
+          <a:prstGeom prst="rect">
+            <a:avLst/>
           </a:prstGeom>
           <a:solidFill>
-            <a:srgbClr val="ECF3FA"/>
+            <a:srgbClr val="FFFFFF"/>
           </a:solidFill>
           <a:ln>
             <a:noFill/>
@@ -7478,14 +7546,58 @@
       </p:sp>
       <p:sp>
         <p:nvSpPr>
-          <p:cNvPr id="21" name="TextBox 20"/>
+          <p:cNvPr id="21" name="Rectangle 20"/>
+          <p:cNvSpPr/>
+          <p:nvPr/>
+        </p:nvSpPr>
+        <p:spPr>
+          <a:xfrm>
+            <a:off x="868680" y="4709160"/>
+            <a:ext cx="50800" cy="1188720"/>
+          </a:xfrm>
+          <a:prstGeom prst="rect">
+            <a:avLst/>
+          </a:prstGeom>
+          <a:solidFill>
+            <a:srgbClr val="A100FF"/>
+          </a:solidFill>
+          <a:ln>
+            <a:noFill/>
+          </a:ln>
+          <a:effectLst/>
+        </p:spPr>
+        <p:style>
+          <a:lnRef idx="1">
+            <a:schemeClr val="accent1"/>
+          </a:lnRef>
+          <a:fillRef idx="3">
+            <a:schemeClr val="accent1"/>
+          </a:fillRef>
+          <a:effectRef idx="2">
+            <a:schemeClr val="accent1"/>
+          </a:effectRef>
+          <a:fontRef idx="minor">
+            <a:schemeClr val="lt1"/>
+          </a:fontRef>
+        </p:style>
+        <p:txBody>
+          <a:bodyPr rtlCol="0" anchor="ctr"/>
+          <a:lstStyle/>
+          <a:p>
+            <a:pPr algn="ctr"/>
+          </a:p>
+        </p:txBody>
+      </p:sp>
+      <p:sp>
+        <p:nvSpPr>
+          <p:cNvPr id="22" name="TextBox 21"/>
           <p:cNvSpPr txBox="1"/>
           <p:nvPr/>
         </p:nvSpPr>
         <p:spPr>
           <a:xfrm>
-            <a:off x="1280160" y="4937760"/>
-            <a:ext cx="9601200" cy="320040"/>
+            <a:off x="1252728" y="4937760"/>
+            <a:ext cx="9601200" cy="274320"/>
           </a:xfrm>
           <a:prstGeom prst="rect">
             <a:avLst/>
@@ -7502,19 +7614,16 @@
               <a:lnSpc>
                 <a:spcPct val="100000"/>
               </a:lnSpc>
-              <a:spcBef>
-                <a:spcPts val="0"/>
-              </a:spcBef>
               <a:spcAft>
                 <a:spcPts val="0"/>
               </a:spcAft>
             </a:pPr>
             <a:r>
-              <a:rPr sz="1050" b="1" i="0">
+              <a:rPr sz="1000" b="1" i="0">
                 <a:solidFill>
-                  <a:srgbClr val="004A8F"/>
+                  <a:srgbClr val="A100FF"/>
                 </a:solidFill>
-                <a:latin typeface="Helvetica Neue"/>
+                <a:latin typeface="Graphik"/>
               </a:rPr>
               <a:t>L'INTEGRAZIONE, IN UNA RIGA</a:t>
             </a:r>
@@ -7523,13 +7632,13 @@
       </p:sp>
       <p:sp>
         <p:nvSpPr>
-          <p:cNvPr id="22" name="TextBox 21"/>
+          <p:cNvPr id="23" name="TextBox 22"/>
           <p:cNvSpPr txBox="1"/>
           <p:nvPr/>
         </p:nvSpPr>
         <p:spPr>
           <a:xfrm>
-            <a:off x="1280160" y="5285232"/>
+            <a:off x="1252728" y="5266944"/>
             <a:ext cx="9601200" cy="457200"/>
           </a:xfrm>
           <a:prstGeom prst="rect">
@@ -7547,25 +7656,46 @@
               <a:lnSpc>
                 <a:spcPct val="120000"/>
               </a:lnSpc>
-              <a:spcBef>
-                <a:spcPts val="0"/>
-              </a:spcBef>
               <a:spcAft>
                 <a:spcPts val="0"/>
               </a:spcAft>
             </a:pPr>
             <a:r>
-              <a:rPr sz="1500" b="1" i="0">
+              <a:rPr sz="1400" b="1" i="0">
                 <a:solidFill>
-                  <a:srgbClr val="141416"/>
+                  <a:srgbClr val="000000"/>
                 </a:solidFill>
-                <a:latin typeface="Helvetica Neue"/>
+                <a:latin typeface="Graphik"/>
               </a:rPr>
-              <a:t>PDF caricato  →  campi estratti  →  ogni etichetta diventa una domanda  →  risposte riscritte nel PDF  →  download</a:t>
-            </a:r>
-          </a:p>
-        </p:txBody>
-      </p:sp>
+              <a:t>PDF caricato   &gt;   campi estratti   &gt;   ogni etichetta diventa una domanda   &gt;   risposte riscritte nel PDF   &gt;   download</a:t>
+            </a:r>
+          </a:p>
+        </p:txBody>
+      </p:sp>
+      <p:pic>
+        <p:nvPicPr>
+          <p:cNvPr id="24" name="Picture 23" descr="accenture-technology-scuro.png"/>
+          <p:cNvPicPr>
+            <a:picLocks noChangeAspect="1"/>
+          </p:cNvPicPr>
+          <p:nvPr/>
+        </p:nvPicPr>
+        <p:blipFill>
+          <a:blip r:embed="rId2"/>
+          <a:stretch>
+            <a:fillRect/>
+          </a:stretch>
+        </p:blipFill>
+        <p:spPr>
+          <a:xfrm>
+            <a:off x="9933127" y="6254782"/>
+            <a:ext cx="1600200" cy="146018"/>
+          </a:xfrm>
+          <a:prstGeom prst="rect">
+            <a:avLst/>
+          </a:prstGeom>
+        </p:spPr>
+      </p:pic>
     </p:spTree>
   </p:cSld>
   <p:clrMapOvr>
@@ -7599,7 +7729,7 @@
             <a:avLst/>
           </a:prstGeom>
           <a:solidFill>
-            <a:srgbClr val="FFFFFF"/>
+            <a:srgbClr val="000000"/>
           </a:solidFill>
           <a:ln>
             <a:noFill/>
@@ -7636,8 +7766,8 @@
         </p:nvSpPr>
         <p:spPr>
           <a:xfrm>
-            <a:off x="914400" y="731520"/>
-            <a:ext cx="8229600" cy="274320"/>
+            <a:off x="868680" y="777240"/>
+            <a:ext cx="8229600" cy="256032"/>
           </a:xfrm>
           <a:prstGeom prst="rect">
             <a:avLst/>
@@ -7654,19 +7784,16 @@
               <a:lnSpc>
                 <a:spcPct val="100000"/>
               </a:lnSpc>
-              <a:spcBef>
-                <a:spcPts val="0"/>
-              </a:spcBef>
               <a:spcAft>
                 <a:spcPts val="0"/>
               </a:spcAft>
             </a:pPr>
             <a:r>
-              <a:rPr sz="1200" b="1" i="0">
+              <a:rPr sz="1150" b="1" i="0">
                 <a:solidFill>
-                  <a:srgbClr val="004A8F"/>
+                  <a:srgbClr val="BE82FF"/>
                 </a:solidFill>
-                <a:latin typeface="Helvetica Neue"/>
+                <a:latin typeface="Graphik"/>
               </a:rPr>
               <a:t>PERCHÉ CONTA</a:t>
             </a:r>
@@ -7681,8 +7808,8 @@
         </p:nvSpPr>
         <p:spPr>
           <a:xfrm>
-            <a:off x="914400" y="1097280"/>
-            <a:ext cx="10332720" cy="731520"/>
+            <a:off x="868680" y="1143000"/>
+            <a:ext cx="10469880" cy="731520"/>
           </a:xfrm>
           <a:prstGeom prst="rect">
             <a:avLst/>
@@ -7699,19 +7826,16 @@
               <a:lnSpc>
                 <a:spcPct val="100000"/>
               </a:lnSpc>
-              <a:spcBef>
-                <a:spcPts val="0"/>
-              </a:spcBef>
               <a:spcAft>
                 <a:spcPts val="0"/>
               </a:spcAft>
             </a:pPr>
             <a:r>
-              <a:rPr sz="3400" b="1" i="0">
+              <a:rPr sz="3300" b="1" i="0">
                 <a:solidFill>
-                  <a:srgbClr val="141416"/>
+                  <a:srgbClr val="FFFFFF"/>
                 </a:solidFill>
-                <a:latin typeface="Helvetica Neue"/>
+                <a:latin typeface="Graphik"/>
               </a:rPr>
               <a:t>I dati non escono mai dalla macchina</a:t>
             </a:r>
@@ -7720,20 +7844,20 @@
       </p:sp>
       <p:sp>
         <p:nvSpPr>
-          <p:cNvPr id="5" name="Oval 4"/>
+          <p:cNvPr id="5" name="Rectangle 4"/>
           <p:cNvSpPr/>
           <p:nvPr/>
         </p:nvSpPr>
         <p:spPr>
           <a:xfrm>
-            <a:off x="914400" y="2258568"/>
-            <a:ext cx="146304" cy="146304"/>
-          </a:xfrm>
-          <a:prstGeom prst="ellipse">
+            <a:off x="868680" y="2331720"/>
+            <a:ext cx="114300" cy="114300"/>
+          </a:xfrm>
+          <a:prstGeom prst="rect">
             <a:avLst/>
           </a:prstGeom>
           <a:solidFill>
-            <a:srgbClr val="004A8F"/>
+            <a:srgbClr val="A100FF"/>
           </a:solidFill>
           <a:ln>
             <a:noFill/>
@@ -7770,8 +7894,8 @@
         </p:nvSpPr>
         <p:spPr>
           <a:xfrm>
-            <a:off x="1325880" y="2148840"/>
-            <a:ext cx="9875520" cy="320040"/>
+            <a:off x="1252728" y="2240280"/>
+            <a:ext cx="9966960" cy="320040"/>
           </a:xfrm>
           <a:prstGeom prst="rect">
             <a:avLst/>
@@ -7788,19 +7912,16 @@
               <a:lnSpc>
                 <a:spcPct val="100000"/>
               </a:lnSpc>
-              <a:spcBef>
-                <a:spcPts val="0"/>
-              </a:spcBef>
               <a:spcAft>
                 <a:spcPts val="0"/>
               </a:spcAft>
             </a:pPr>
             <a:r>
-              <a:rPr sz="1800" b="1" i="0">
+              <a:rPr sz="1700" b="1" i="0">
                 <a:solidFill>
-                  <a:srgbClr val="141416"/>
+                  <a:srgbClr val="FFFFFF"/>
                 </a:solidFill>
-                <a:latin typeface="Helvetica Neue"/>
+                <a:latin typeface="Graphik"/>
               </a:rPr>
               <a:t>Nessun account, per nessuno</a:t>
             </a:r>
@@ -7815,8 +7936,8 @@
         </p:nvSpPr>
         <p:spPr>
           <a:xfrm>
-            <a:off x="1325880" y="2514600"/>
-            <a:ext cx="9692640" cy="457200"/>
+            <a:off x="1252728" y="2587752"/>
+            <a:ext cx="9692640" cy="411480"/>
           </a:xfrm>
           <a:prstGeom prst="rect">
             <a:avLst/>
@@ -7833,19 +7954,16 @@
               <a:lnSpc>
                 <a:spcPct val="125000"/>
               </a:lnSpc>
-              <a:spcBef>
-                <a:spcPts val="0"/>
-              </a:spcBef>
               <a:spcAft>
                 <a:spcPts val="0"/>
               </a:spcAft>
             </a:pPr>
             <a:r>
-              <a:rPr sz="1350" b="0" i="0">
+              <a:rPr sz="1250" b="0" i="0">
                 <a:solidFill>
-                  <a:srgbClr val="5A5F66"/>
+                  <a:srgbClr val="E6E6DC"/>
                 </a:solidFill>
-                <a:latin typeface="Helvetica Neue"/>
+                <a:latin typeface="Graphik"/>
               </a:rPr>
               <a:t>Né per chi usa lo strumento, né per chi lo installa. Nessun abbonamento AI.</a:t>
             </a:r>
@@ -7854,20 +7972,20 @@
       </p:sp>
       <p:sp>
         <p:nvSpPr>
-          <p:cNvPr id="8" name="Oval 7"/>
+          <p:cNvPr id="8" name="Rectangle 7"/>
           <p:cNvSpPr/>
           <p:nvPr/>
         </p:nvSpPr>
         <p:spPr>
           <a:xfrm>
-            <a:off x="914400" y="3218688"/>
-            <a:ext cx="146304" cy="146304"/>
-          </a:xfrm>
-          <a:prstGeom prst="ellipse">
+            <a:off x="868680" y="3246120"/>
+            <a:ext cx="114300" cy="114300"/>
+          </a:xfrm>
+          <a:prstGeom prst="rect">
             <a:avLst/>
           </a:prstGeom>
           <a:solidFill>
-            <a:srgbClr val="004A8F"/>
+            <a:srgbClr val="A100FF"/>
           </a:solidFill>
           <a:ln>
             <a:noFill/>
@@ -7904,8 +8022,8 @@
         </p:nvSpPr>
         <p:spPr>
           <a:xfrm>
-            <a:off x="1325880" y="3108960"/>
-            <a:ext cx="9875520" cy="320040"/>
+            <a:off x="1252728" y="3154680"/>
+            <a:ext cx="9966960" cy="320040"/>
           </a:xfrm>
           <a:prstGeom prst="rect">
             <a:avLst/>
@@ -7922,19 +8040,16 @@
               <a:lnSpc>
                 <a:spcPct val="100000"/>
               </a:lnSpc>
-              <a:spcBef>
-                <a:spcPts val="0"/>
-              </a:spcBef>
               <a:spcAft>
                 <a:spcPts val="0"/>
               </a:spcAft>
             </a:pPr>
             <a:r>
-              <a:rPr sz="1800" b="1" i="0">
+              <a:rPr sz="1700" b="1" i="0">
                 <a:solidFill>
-                  <a:srgbClr val="141416"/>
+                  <a:srgbClr val="FFFFFF"/>
                 </a:solidFill>
-                <a:latin typeface="Helvetica Neue"/>
+                <a:latin typeface="Graphik"/>
               </a:rPr>
               <a:t>Il modello gira in locale</a:t>
             </a:r>
@@ -7949,8 +8064,8 @@
         </p:nvSpPr>
         <p:spPr>
           <a:xfrm>
-            <a:off x="1325880" y="3474720"/>
-            <a:ext cx="9692640" cy="457200"/>
+            <a:off x="1252728" y="3502152"/>
+            <a:ext cx="9692640" cy="411480"/>
           </a:xfrm>
           <a:prstGeom prst="rect">
             <a:avLst/>
@@ -7967,19 +8082,16 @@
               <a:lnSpc>
                 <a:spcPct val="125000"/>
               </a:lnSpc>
-              <a:spcBef>
-                <a:spcPts val="0"/>
-              </a:spcBef>
               <a:spcAft>
                 <a:spcPts val="0"/>
               </a:spcAft>
             </a:pPr>
             <a:r>
-              <a:rPr sz="1350" b="0" i="0">
+              <a:rPr sz="1250" b="0" i="0">
                 <a:solidFill>
-                  <a:srgbClr val="5A5F66"/>
+                  <a:srgbClr val="E6E6DC"/>
                 </a:solidFill>
-                <a:latin typeface="Helvetica Neue"/>
+                <a:latin typeface="Graphik"/>
               </a:rPr>
               <a:t>Nome, indirizzo, codice fiscale non lasciano il computer. Non è una promessa contrattuale: è architettura.</a:t>
             </a:r>
@@ -7988,20 +8100,20 @@
       </p:sp>
       <p:sp>
         <p:nvSpPr>
-          <p:cNvPr id="11" name="Oval 10"/>
+          <p:cNvPr id="11" name="Rectangle 10"/>
           <p:cNvSpPr/>
           <p:nvPr/>
         </p:nvSpPr>
         <p:spPr>
           <a:xfrm>
-            <a:off x="914400" y="4178808"/>
-            <a:ext cx="146304" cy="146304"/>
-          </a:xfrm>
-          <a:prstGeom prst="ellipse">
+            <a:off x="868680" y="4160520"/>
+            <a:ext cx="114300" cy="114300"/>
+          </a:xfrm>
+          <a:prstGeom prst="rect">
             <a:avLst/>
           </a:prstGeom>
           <a:solidFill>
-            <a:srgbClr val="004A8F"/>
+            <a:srgbClr val="A100FF"/>
           </a:solidFill>
           <a:ln>
             <a:noFill/>
@@ -8038,8 +8150,8 @@
         </p:nvSpPr>
         <p:spPr>
           <a:xfrm>
-            <a:off x="1325880" y="4069080"/>
-            <a:ext cx="9875520" cy="320040"/>
+            <a:off x="1252728" y="4069080"/>
+            <a:ext cx="9966960" cy="320040"/>
           </a:xfrm>
           <a:prstGeom prst="rect">
             <a:avLst/>
@@ -8056,19 +8168,16 @@
               <a:lnSpc>
                 <a:spcPct val="100000"/>
               </a:lnSpc>
-              <a:spcBef>
-                <a:spcPts val="0"/>
-              </a:spcBef>
               <a:spcAft>
                 <a:spcPts val="0"/>
               </a:spcAft>
             </a:pPr>
             <a:r>
-              <a:rPr sz="1800" b="1" i="0">
+              <a:rPr sz="1700" b="1" i="0">
                 <a:solidFill>
-                  <a:srgbClr val="141416"/>
+                  <a:srgbClr val="FFFFFF"/>
                 </a:solidFill>
-                <a:latin typeface="Helvetica Neue"/>
+                <a:latin typeface="Graphik"/>
               </a:rPr>
               <a:t>Funziona su qualsiasi modulo compilabile</a:t>
             </a:r>
@@ -8083,8 +8192,8 @@
         </p:nvSpPr>
         <p:spPr>
           <a:xfrm>
-            <a:off x="1325880" y="4434840"/>
-            <a:ext cx="9692640" cy="457200"/>
+            <a:off x="1252728" y="4416552"/>
+            <a:ext cx="9692640" cy="411480"/>
           </a:xfrm>
           <a:prstGeom prst="rect">
             <a:avLst/>
@@ -8101,19 +8210,16 @@
               <a:lnSpc>
                 <a:spcPct val="125000"/>
               </a:lnSpc>
-              <a:spcBef>
-                <a:spcPts val="0"/>
-              </a:spcBef>
               <a:spcAft>
                 <a:spcPts val="0"/>
               </a:spcAft>
             </a:pPr>
             <a:r>
-              <a:rPr sz="1350" b="0" i="0">
+              <a:rPr sz="1250" b="0" i="0">
                 <a:solidFill>
-                  <a:srgbClr val="5A5F66"/>
+                  <a:srgbClr val="E6E6DC"/>
                 </a:solidFill>
-                <a:latin typeface="Helvetica Neue"/>
+                <a:latin typeface="Graphik"/>
               </a:rPr>
               <a:t>Non è legato a un modulo specifico: legge i campi di qualunque PDF con moduli.</a:t>
             </a:r>
@@ -8122,20 +8228,20 @@
       </p:sp>
       <p:sp>
         <p:nvSpPr>
-          <p:cNvPr id="14" name="Oval 13"/>
+          <p:cNvPr id="14" name="Rectangle 13"/>
           <p:cNvSpPr/>
           <p:nvPr/>
         </p:nvSpPr>
         <p:spPr>
           <a:xfrm>
-            <a:off x="914400" y="5138928"/>
-            <a:ext cx="146304" cy="146304"/>
-          </a:xfrm>
-          <a:prstGeom prst="ellipse">
+            <a:off x="868680" y="5074920"/>
+            <a:ext cx="114300" cy="114300"/>
+          </a:xfrm>
+          <a:prstGeom prst="rect">
             <a:avLst/>
           </a:prstGeom>
           <a:solidFill>
-            <a:srgbClr val="004A8F"/>
+            <a:srgbClr val="A100FF"/>
           </a:solidFill>
           <a:ln>
             <a:noFill/>
@@ -8172,8 +8278,8 @@
         </p:nvSpPr>
         <p:spPr>
           <a:xfrm>
-            <a:off x="1325880" y="5029200"/>
-            <a:ext cx="9875520" cy="320040"/>
+            <a:off x="1252728" y="4983480"/>
+            <a:ext cx="9966960" cy="320040"/>
           </a:xfrm>
           <a:prstGeom prst="rect">
             <a:avLst/>
@@ -8190,19 +8296,16 @@
               <a:lnSpc>
                 <a:spcPct val="100000"/>
               </a:lnSpc>
-              <a:spcBef>
-                <a:spcPts val="0"/>
-              </a:spcBef>
               <a:spcAft>
                 <a:spcPts val="0"/>
               </a:spcAft>
             </a:pPr>
             <a:r>
-              <a:rPr sz="1800" b="1" i="0">
+              <a:rPr sz="1700" b="1" i="0">
                 <a:solidFill>
-                  <a:srgbClr val="141416"/>
+                  <a:srgbClr val="FFFFFF"/>
                 </a:solidFill>
-                <a:latin typeface="Helvetica Neue"/>
+                <a:latin typeface="Graphik"/>
               </a:rPr>
               <a:t>Se il modello non risponde, si continua lo stesso</a:t>
             </a:r>
@@ -8217,8 +8320,8 @@
         </p:nvSpPr>
         <p:spPr>
           <a:xfrm>
-            <a:off x="1325880" y="5394960"/>
-            <a:ext cx="9692640" cy="457200"/>
+            <a:off x="1252728" y="5330952"/>
+            <a:ext cx="9692640" cy="411480"/>
           </a:xfrm>
           <a:prstGeom prst="rect">
             <a:avLst/>
@@ -8235,19 +8338,16 @@
               <a:lnSpc>
                 <a:spcPct val="125000"/>
               </a:lnSpc>
-              <a:spcBef>
-                <a:spcPts val="0"/>
-              </a:spcBef>
               <a:spcAft>
                 <a:spcPts val="0"/>
               </a:spcAft>
             </a:pPr>
             <a:r>
-              <a:rPr sz="1350" b="0" i="0">
+              <a:rPr sz="1250" b="0" i="0">
                 <a:solidFill>
-                  <a:srgbClr val="5A5F66"/>
+                  <a:srgbClr val="E6E6DC"/>
                 </a:solidFill>
-                <a:latin typeface="Helvetica Neue"/>
+                <a:latin typeface="Graphik"/>
               </a:rPr>
               <a:t>Lo strumento mostra l'etichetta originale e la persona arriva comunque in fondo.</a:t>
             </a:r>
@@ -8262,14 +8362,14 @@
         </p:nvSpPr>
         <p:spPr>
           <a:xfrm>
-            <a:off x="914400" y="5897880"/>
-            <a:ext cx="10332720" cy="25400"/>
+            <a:off x="868680" y="5943600"/>
+            <a:ext cx="10469880" cy="25400"/>
           </a:xfrm>
           <a:prstGeom prst="rect">
             <a:avLst/>
           </a:prstGeom>
           <a:solidFill>
-            <a:srgbClr val="004A8F"/>
+            <a:srgbClr val="A100FF"/>
           </a:solidFill>
           <a:ln>
             <a:noFill/>
@@ -8306,8 +8406,8 @@
         </p:nvSpPr>
         <p:spPr>
           <a:xfrm>
-            <a:off x="914400" y="6126480"/>
-            <a:ext cx="10332720" cy="457200"/>
+            <a:off x="868680" y="6153912"/>
+            <a:ext cx="8229600" cy="457200"/>
           </a:xfrm>
           <a:prstGeom prst="rect">
             <a:avLst/>
@@ -8324,25 +8424,46 @@
               <a:lnSpc>
                 <a:spcPct val="100000"/>
               </a:lnSpc>
-              <a:spcBef>
-                <a:spcPts val="0"/>
-              </a:spcBef>
               <a:spcAft>
                 <a:spcPts val="0"/>
               </a:spcAft>
             </a:pPr>
             <a:r>
-              <a:rPr sz="1700" b="1" i="0">
+              <a:rPr sz="1600" b="1" i="0">
                 <a:solidFill>
-                  <a:srgbClr val="004A8F"/>
+                  <a:srgbClr val="BE82FF"/>
                 </a:solidFill>
-                <a:latin typeface="Helvetica Neue"/>
+                <a:latin typeface="Graphik"/>
               </a:rPr>
-              <a:t>Un campo alla volta — dal modulo bianco alla pratica conclusa.</a:t>
-            </a:r>
-          </a:p>
-        </p:txBody>
-      </p:sp>
+              <a:t>Dal modulo bianco alla pratica conclusa.</a:t>
+            </a:r>
+          </a:p>
+        </p:txBody>
+      </p:sp>
+      <p:pic>
+        <p:nvPicPr>
+          <p:cNvPr id="19" name="Picture 18" descr="accenture-technology-chiaro.png"/>
+          <p:cNvPicPr>
+            <a:picLocks noChangeAspect="1"/>
+          </p:cNvPicPr>
+          <p:nvPr/>
+        </p:nvPicPr>
+        <p:blipFill>
+          <a:blip r:embed="rId2"/>
+          <a:stretch>
+            <a:fillRect/>
+          </a:stretch>
+        </p:blipFill>
+        <p:spPr>
+          <a:xfrm>
+            <a:off x="9933127" y="6254782"/>
+            <a:ext cx="1600200" cy="146018"/>
+          </a:xfrm>
+          <a:prstGeom prst="rect">
+            <a:avLst/>
+          </a:prstGeom>
+        </p:spPr>
+      </p:pic>
     </p:spTree>
   </p:cSld>
   <p:clrMapOvr>
@@ -8352,116 +8473,56 @@
 </file>
 
 <file path=ppt/theme/theme1.xml><?xml version="1.0" encoding="utf-8"?>
-<a:theme xmlns:a="http://schemas.openxmlformats.org/drawingml/2006/main" name="Office Theme">
+<a:theme xmlns:a="http://schemas.openxmlformats.org/drawingml/2006/main" name="Accenture 2020">
   <a:themeElements>
-    <a:clrScheme name="Office">
+    <a:clrScheme name="Accenture 2020">
       <a:dk1>
-        <a:sysClr val="windowText" lastClr="000000"/>
+        <a:srgbClr val="000000"/>
       </a:dk1>
       <a:lt1>
-        <a:sysClr val="window" lastClr="FFFFFF"/>
+        <a:srgbClr val="FFFFFF"/>
       </a:lt1>
       <a:dk2>
-        <a:srgbClr val="1F497D"/>
+        <a:srgbClr val="96968C"/>
       </a:dk2>
       <a:lt2>
-        <a:srgbClr val="EEECE1"/>
+        <a:srgbClr val="E6E6DC"/>
       </a:lt2>
       <a:accent1>
-        <a:srgbClr val="4F81BD"/>
+        <a:srgbClr val="A100FF"/>
       </a:accent1>
       <a:accent2>
-        <a:srgbClr val="C0504D"/>
+        <a:srgbClr val="7500C0"/>
       </a:accent2>
       <a:accent3>
-        <a:srgbClr val="9BBB59"/>
+        <a:srgbClr val="460073"/>
       </a:accent3>
       <a:accent4>
-        <a:srgbClr val="8064A2"/>
+        <a:srgbClr val="B455AA"/>
       </a:accent4>
       <a:accent5>
-        <a:srgbClr val="4BACC6"/>
+        <a:srgbClr val="BE82FF"/>
       </a:accent5>
       <a:accent6>
-        <a:srgbClr val="F79646"/>
+        <a:srgbClr val="DCAFFF"/>
       </a:accent6>
       <a:hlink>
-        <a:srgbClr val="0000FF"/>
+        <a:srgbClr val="A100FF"/>
       </a:hlink>
       <a:folHlink>
-        <a:srgbClr val="800080"/>
+        <a:srgbClr val="7500C0"/>
       </a:folHlink>
     </a:clrScheme>
-    <a:fontScheme name="Office">
+    <a:fontScheme name="Accenture - Graphik">
       <a:majorFont>
-        <a:latin typeface="Calibri"/>
+        <a:latin typeface="Graphik"/>
         <a:ea typeface=""/>
         <a:cs typeface=""/>
-        <a:font script="Jpan" typeface="ＭＳ Ｐゴシック"/>
-        <a:font script="Hang" typeface="맑은 고딕"/>
-        <a:font script="Hans" typeface="宋体"/>
-        <a:font script="Hant" typeface="新細明體"/>
-        <a:font script="Arab" typeface="Times New Roman"/>
-        <a:font script="Hebr" typeface="Times New Roman"/>
-        <a:font script="Thai" typeface="Angsana New"/>
-        <a:font script="Ethi" typeface="Nyala"/>
-        <a:font script="Beng" typeface="Vrinda"/>
-        <a:font script="Gujr" typeface="Shruti"/>
-        <a:font script="Khmr" typeface="MoolBoran"/>
-        <a:font script="Knda" typeface="Tunga"/>
-        <a:font script="Guru" typeface="Raavi"/>
-        <a:font script="Cans" typeface="Euphemia"/>
-        <a:font script="Cher" typeface="Plantagenet Cherokee"/>
-        <a:font script="Yiii" typeface="Microsoft Yi Baiti"/>
-        <a:font script="Tibt" typeface="Microsoft Himalaya"/>
-        <a:font script="Thaa" typeface="MV Boli"/>
-        <a:font script="Deva" typeface="Mangal"/>
-        <a:font script="Telu" typeface="Gautami"/>
-        <a:font script="Taml" typeface="Latha"/>
-        <a:font script="Syrc" typeface="Estrangelo Edessa"/>
-        <a:font script="Orya" typeface="Kalinga"/>
-        <a:font script="Mlym" typeface="Kartika"/>
-        <a:font script="Laoo" typeface="DokChampa"/>
-        <a:font script="Sinh" typeface="Iskoola Pota"/>
-        <a:font script="Mong" typeface="Mongolian Baiti"/>
-        <a:font script="Viet" typeface="Times New Roman"/>
-        <a:font script="Uigh" typeface="Microsoft Uighur"/>
-        <a:font script="Geor" typeface="Sylfaen"/>
       </a:majorFont>
       <a:minorFont>
-        <a:latin typeface="Calibri"/>
+        <a:latin typeface="Graphik"/>
         <a:ea typeface=""/>
         <a:cs typeface=""/>
-        <a:font script="Jpan" typeface="ＭＳ Ｐゴシック"/>
-        <a:font script="Hang" typeface="맑은 고딕"/>
-        <a:font script="Hans" typeface="宋体"/>
-        <a:font script="Hant" typeface="新細明體"/>
-        <a:font script="Arab" typeface="Arial"/>
-        <a:font script="Hebr" typeface="Arial"/>
-        <a:font script="Thai" typeface="Cordia New"/>
-        <a:font script="Ethi" typeface="Nyala"/>
-        <a:font script="Beng" typeface="Vrinda"/>
-        <a:font script="Gujr" typeface="Shruti"/>
-        <a:font script="Khmr" typeface="DaunPenh"/>
-        <a:font script="Knda" typeface="Tunga"/>
-        <a:font script="Guru" typeface="Raavi"/>
-        <a:font script="Cans" typeface="Euphemia"/>
-        <a:font script="Cher" typeface="Plantagenet Cherokee"/>
-        <a:font script="Yiii" typeface="Microsoft Yi Baiti"/>
-        <a:font script="Tibt" typeface="Microsoft Himalaya"/>
-        <a:font script="Thaa" typeface="MV Boli"/>
-        <a:font script="Deva" typeface="Mangal"/>
-        <a:font script="Telu" typeface="Gautami"/>
-        <a:font script="Taml" typeface="Latha"/>
-        <a:font script="Syrc" typeface="Estrangelo Edessa"/>
-        <a:font script="Orya" typeface="Kalinga"/>
-        <a:font script="Mlym" typeface="Kartika"/>
-        <a:font script="Laoo" typeface="DokChampa"/>
-        <a:font script="Sinh" typeface="Iskoola Pota"/>
-        <a:font script="Mong" typeface="Mongolian Baiti"/>
-        <a:font script="Viet" typeface="Arial"/>
-        <a:font script="Uigh" typeface="Microsoft Uighur"/>
-        <a:font script="Geor" typeface="Sylfaen"/>
       </a:minorFont>
     </a:fontScheme>
     <a:fmtScheme name="Office">
@@ -8473,173 +8534,161 @@
           <a:gsLst>
             <a:gs pos="0">
               <a:schemeClr val="phClr">
-                <a:tint val="50000"/>
-                <a:satMod val="300000"/>
+                <a:lumMod val="110000"/>
+                <a:satMod val="105000"/>
+                <a:tint val="67000"/>
               </a:schemeClr>
             </a:gs>
-            <a:gs pos="35000">
+            <a:gs pos="50000">
               <a:schemeClr val="phClr">
-                <a:tint val="37000"/>
-                <a:satMod val="300000"/>
+                <a:lumMod val="105000"/>
+                <a:satMod val="103000"/>
+                <a:tint val="73000"/>
               </a:schemeClr>
             </a:gs>
             <a:gs pos="100000">
               <a:schemeClr val="phClr">
-                <a:tint val="15000"/>
-                <a:satMod val="350000"/>
+                <a:lumMod val="105000"/>
+                <a:satMod val="109000"/>
+                <a:tint val="81000"/>
               </a:schemeClr>
             </a:gs>
           </a:gsLst>
-          <a:lin ang="16200000" scaled="1"/>
+          <a:lin ang="5400000" scaled="0"/>
         </a:gradFill>
         <a:gradFill rotWithShape="1">
           <a:gsLst>
             <a:gs pos="0">
               <a:schemeClr val="phClr">
-                <a:tint val="100000"/>
+                <a:satMod val="103000"/>
+                <a:lumMod val="102000"/>
+                <a:tint val="94000"/>
+              </a:schemeClr>
+            </a:gs>
+            <a:gs pos="50000">
+              <a:schemeClr val="phClr">
+                <a:satMod val="110000"/>
+                <a:lumMod val="100000"/>
                 <a:shade val="100000"/>
-                <a:satMod val="130000"/>
               </a:schemeClr>
             </a:gs>
             <a:gs pos="100000">
               <a:schemeClr val="phClr">
-                <a:tint val="50000"/>
-                <a:shade val="100000"/>
-                <a:satMod val="350000"/>
+                <a:lumMod val="99000"/>
+                <a:satMod val="120000"/>
+                <a:shade val="78000"/>
               </a:schemeClr>
             </a:gs>
           </a:gsLst>
-          <a:lin ang="16200000" scaled="0"/>
+          <a:lin ang="5400000" scaled="0"/>
         </a:gradFill>
       </a:fillStyleLst>
       <a:lnStyleLst>
-        <a:ln w="9525" cap="flat" cmpd="sng" algn="ctr">
-          <a:solidFill>
-            <a:schemeClr val="phClr">
-              <a:shade val="95000"/>
-              <a:satMod val="105000"/>
-            </a:schemeClr>
-          </a:solidFill>
-          <a:prstDash val="solid"/>
-        </a:ln>
-        <a:ln w="25400" cap="flat" cmpd="sng" algn="ctr">
+        <a:ln w="6350" cap="flat" cmpd="sng" algn="ctr">
           <a:solidFill>
             <a:schemeClr val="phClr"/>
           </a:solidFill>
           <a:prstDash val="solid"/>
+          <a:miter lim="800000"/>
         </a:ln>
-        <a:ln w="38100" cap="flat" cmpd="sng" algn="ctr">
+        <a:ln w="12700" cap="flat" cmpd="sng" algn="ctr">
           <a:solidFill>
             <a:schemeClr val="phClr"/>
           </a:solidFill>
           <a:prstDash val="solid"/>
+          <a:miter lim="800000"/>
+        </a:ln>
+        <a:ln w="19050" cap="flat" cmpd="sng" algn="ctr">
+          <a:solidFill>
+            <a:schemeClr val="phClr"/>
+          </a:solidFill>
+          <a:prstDash val="solid"/>
+          <a:miter lim="800000"/>
         </a:ln>
       </a:lnStyleLst>
       <a:effectStyleLst>
         <a:effectStyle>
+          <a:effectLst/>
+        </a:effectStyle>
+        <a:effectStyle>
+          <a:effectLst/>
+        </a:effectStyle>
+        <a:effectStyle>
           <a:effectLst>
-            <a:outerShdw blurRad="40000" dist="20000" dir="5400000" rotWithShape="0">
+            <a:outerShdw blurRad="57150" dist="19050" dir="5400000" algn="ctr" rotWithShape="0">
               <a:srgbClr val="000000">
-                <a:alpha val="38000"/>
+                <a:alpha val="63000"/>
               </a:srgbClr>
             </a:outerShdw>
           </a:effectLst>
-        </a:effectStyle>
-        <a:effectStyle>
-          <a:effectLst>
-            <a:outerShdw blurRad="40000" dist="23000" dir="5400000" rotWithShape="0">
-              <a:srgbClr val="000000">
-                <a:alpha val="35000"/>
-              </a:srgbClr>
-            </a:outerShdw>
-          </a:effectLst>
-        </a:effectStyle>
-        <a:effectStyle>
-          <a:effectLst>
-            <a:outerShdw blurRad="40000" dist="23000" dir="5400000" rotWithShape="0">
-              <a:srgbClr val="000000">
-                <a:alpha val="35000"/>
-              </a:srgbClr>
-            </a:outerShdw>
-          </a:effectLst>
-          <a:scene3d>
-            <a:camera prst="orthographicFront">
-              <a:rot lat="0" lon="0" rev="0"/>
-            </a:camera>
-            <a:lightRig rig="threePt" dir="t">
-              <a:rot lat="0" lon="0" rev="1200000"/>
-            </a:lightRig>
-          </a:scene3d>
-          <a:sp3d>
-            <a:bevelT w="63500" h="25400"/>
-          </a:sp3d>
         </a:effectStyle>
       </a:effectStyleLst>
       <a:bgFillStyleLst>
         <a:solidFill>
           <a:schemeClr val="phClr"/>
         </a:solidFill>
+        <a:solidFill>
+          <a:schemeClr val="phClr">
+            <a:tint val="95000"/>
+            <a:satMod val="170000"/>
+          </a:schemeClr>
+        </a:solidFill>
         <a:gradFill rotWithShape="1">
           <a:gsLst>
             <a:gs pos="0">
               <a:schemeClr val="phClr">
-                <a:tint val="40000"/>
-                <a:satMod val="350000"/>
+                <a:tint val="93000"/>
+                <a:satMod val="150000"/>
+                <a:shade val="98000"/>
+                <a:lumMod val="102000"/>
               </a:schemeClr>
             </a:gs>
-            <a:gs pos="40000">
+            <a:gs pos="50000">
               <a:schemeClr val="phClr">
-                <a:tint val="45000"/>
-                <a:shade val="99000"/>
-                <a:satMod val="350000"/>
+                <a:tint val="98000"/>
+                <a:satMod val="130000"/>
+                <a:shade val="90000"/>
+                <a:lumMod val="103000"/>
               </a:schemeClr>
             </a:gs>
             <a:gs pos="100000">
               <a:schemeClr val="phClr">
-                <a:shade val="20000"/>
-                <a:satMod val="255000"/>
+                <a:shade val="63000"/>
+                <a:satMod val="120000"/>
               </a:schemeClr>
             </a:gs>
           </a:gsLst>
-          <a:path path="circle">
-            <a:fillToRect l="50000" t="-80000" r="50000" b="180000"/>
-          </a:path>
-        </a:gradFill>
-        <a:gradFill rotWithShape="1">
-          <a:gsLst>
-            <a:gs pos="0">
-              <a:schemeClr val="phClr">
-                <a:tint val="80000"/>
-                <a:satMod val="300000"/>
-              </a:schemeClr>
-            </a:gs>
-            <a:gs pos="100000">
-              <a:schemeClr val="phClr">
-                <a:shade val="30000"/>
-                <a:satMod val="200000"/>
-              </a:schemeClr>
-            </a:gs>
-          </a:gsLst>
-          <a:path path="circle">
-            <a:fillToRect l="50000" t="50000" r="50000" b="50000"/>
-          </a:path>
+          <a:lin ang="5400000" scaled="0"/>
         </a:gradFill>
       </a:bgFillStyleLst>
     </a:fmtScheme>
   </a:themeElements>
   <a:objectDefaults>
     <a:spDef>
-      <a:spPr/>
-      <a:bodyPr/>
-      <a:lstStyle/>
+      <a:spPr>
+        <a:solidFill>
+          <a:schemeClr val="accent2"/>
+        </a:solidFill>
+        <a:ln>
+          <a:noFill/>
+        </a:ln>
+      </a:spPr>
+      <a:bodyPr tIns="91440" bIns="91440" rtlCol="0" anchor="ctr"/>
+      <a:lstStyle>
+        <a:defPPr algn="ctr">
+          <a:defRPr dirty="0" err="1" smtClean="0"/>
+        </a:defPPr>
+      </a:lstStyle>
       <a:style>
-        <a:lnRef idx="1">
-          <a:schemeClr val="accent1"/>
+        <a:lnRef idx="2">
+          <a:schemeClr val="accent1">
+            <a:shade val="50000"/>
+          </a:schemeClr>
         </a:lnRef>
-        <a:fillRef idx="3">
+        <a:fillRef idx="1">
           <a:schemeClr val="accent1"/>
         </a:fillRef>
-        <a:effectRef idx="2">
+        <a:effectRef idx="0">
           <a:schemeClr val="accent1"/>
         </a:effectRef>
         <a:fontRef idx="minor">
@@ -8648,17 +8697,23 @@
       </a:style>
     </a:spDef>
     <a:lnDef>
-      <a:spPr/>
+      <a:spPr>
+        <a:ln w="28575">
+          <a:solidFill>
+            <a:schemeClr val="accent1"/>
+          </a:solidFill>
+        </a:ln>
+      </a:spPr>
       <a:bodyPr/>
       <a:lstStyle/>
       <a:style>
-        <a:lnRef idx="2">
+        <a:lnRef idx="1">
           <a:schemeClr val="accent1"/>
         </a:lnRef>
         <a:fillRef idx="0">
           <a:schemeClr val="accent1"/>
         </a:fillRef>
-        <a:effectRef idx="1">
+        <a:effectRef idx="0">
           <a:schemeClr val="accent1"/>
         </a:effectRef>
         <a:fontRef idx="minor">
@@ -8666,8 +8721,91 @@
         </a:fontRef>
       </a:style>
     </a:lnDef>
+    <a:txDef>
+      <a:spPr>
+        <a:noFill/>
+      </a:spPr>
+      <a:bodyPr wrap="square" lIns="0" tIns="0" rIns="0" bIns="0" rtlCol="0">
+        <a:noAutofit/>
+      </a:bodyPr>
+      <a:lstStyle>
+        <a:defPPr algn="l" defTabSz="228600">
+          <a:spcAft>
+            <a:spcPts val="1200"/>
+          </a:spcAft>
+          <a:defRPr noProof="0" dirty="0" smtClean="0"/>
+        </a:defPPr>
+      </a:lstStyle>
+    </a:txDef>
   </a:objectDefaults>
   <a:extraClrSchemeLst/>
+  <a:custClrLst>
+    <a:custClr name="Accent Purple 1">
+      <a:srgbClr val="B455AA"/>
+    </a:custClr>
+    <a:custClr name="Accent Purple 2">
+      <a:srgbClr val="A055F5"/>
+    </a:custClr>
+    <a:custClr name="Accent Purple 3">
+      <a:srgbClr val="BE82FF"/>
+    </a:custClr>
+    <a:custClr name="Accent Purple 4">
+      <a:srgbClr val="DCAFFF"/>
+    </a:custClr>
+    <a:custClr name="Accent Purple 5">
+      <a:srgbClr val="E6DCFF"/>
+    </a:custClr>
+    <a:custClr name="BLANK">
+      <a:srgbClr val="FFFFFF"/>
+    </a:custClr>
+    <a:custClr name="BLANK">
+      <a:srgbClr val="FFFFFF"/>
+    </a:custClr>
+    <a:custClr name="BLANK">
+      <a:srgbClr val="FFFFFF"/>
+    </a:custClr>
+    <a:custClr name="BLANK">
+      <a:srgbClr val="FFFFFF"/>
+    </a:custClr>
+    <a:custClr name="BLANK">
+      <a:srgbClr val="FFFFFF"/>
+    </a:custClr>
+    <a:custClr name="Blue">
+      <a:srgbClr val="0041F0"/>
+    </a:custClr>
+    <a:custClr name="Light Blue">
+      <a:srgbClr val="00FFFF"/>
+    </a:custClr>
+    <a:custClr name="Green">
+      <a:srgbClr val="64FF50"/>
+    </a:custClr>
+    <a:custClr name="Blue Green">
+      <a:srgbClr val="05F0A5"/>
+    </a:custClr>
+    <a:custClr name="Red">
+      <a:srgbClr val="FF3246"/>
+    </a:custClr>
+    <a:custClr name="Pink">
+      <a:srgbClr val="FF50A0"/>
+    </a:custClr>
+    <a:custClr name="Orange">
+      <a:srgbClr val="FF7800"/>
+    </a:custClr>
+    <a:custClr name="Yellow">
+      <a:srgbClr val="FFEB32"/>
+    </a:custClr>
+    <a:custClr name="BLANK">
+      <a:srgbClr val="FFFFFF"/>
+    </a:custClr>
+    <a:custClr name="BLANK">
+      <a:srgbClr val="FFFFFF"/>
+    </a:custClr>
+  </a:custClrLst>
+  <a:extLst>
+    <a:ext uri="{05A4C25C-085E-4340-85A3-A5531E510DB2}">
+      <thm15:themeFamily xmlns:thm15="http://schemas.microsoft.com/office/thememl/2012/main" name="IMP_Acc_PPT_Tmplt_Graphik_210225_Fixed_Accessible.potx" id="{80BF15C9-A5DA-472C-9F1E-82F4EBB43D59}" vid="{02DD174B-CE7A-418B-90DA-AC9D16AAE59C}"/>
+    </a:ext>
+  </a:extLst>
 </a:theme>
 </file>
 

--- a/app/presentation/un-campo-alla-volta.pptx
+++ b/app/presentation/un-campo-alla-volta.pptx
@@ -508,7 +508,7 @@
           <a:lstStyle/>
           <a:p>
             <a:r>
-              <a:t>0:00-0:15 — Titolo. Una frase sola: questo strumento non spiega il documento, lo porta a termine. Tre passi, nessuna registrazione.</a:t>
+              <a:t>0:00-0:15 — Titolo. Il difetto non è di chi legge: è del modulo, che chiede cose semplici in modo complicato. Lo strumento non spiega il documento, lo porta a termine. Tre passi, nessuna registrazione.</a:t>
             </a:r>
           </a:p>
         </p:txBody>
@@ -578,7 +578,7 @@
           <a:lstStyle/>
           <a:p>
             <a:r>
-              <a:t>0:15-0:45 — Il problema non è la persona, è il linguaggio. Leggere ad alta voce l'etichetta: nessuno in sala sa cosa chiede, ed è un campo vero di un modulo comunale. L'esito è sempre lo stesso: o chiede aiuto, o rinuncia.</a:t>
+              <a:t>0:15-0:45 — Leggere ad alta voce l'etichetta e fermarsi un secondo: nessuno in sala sa cosa chiede, ed è un campo vero di un modulo comunale. Il punto è questo: l'informazione richiesta è banale — che titolo hai sulla casa — ma il modo di chiederla non lo è. L'esito è sempre lo stesso: o serve qualcun altro, o si rinuncia.</a:t>
             </a:r>
           </a:p>
         </p:txBody>
@@ -4075,14 +4075,14 @@
               </a:spcAft>
             </a:pPr>
             <a:r>
-              <a:rPr sz="2300" b="0" i="0">
+              <a:rPr sz="2700" b="0" i="0">
                 <a:solidFill>
                   <a:srgbClr val="E6E6DC"/>
                 </a:solidFill>
                 <a:latin typeface="Graphik"/>
               </a:rPr>
-              <a:t>Chi non capisce il linguaggio burocratico
-compila il modulo da solo, fino in fondo.</a:t>
+              <a:t>La burocrazia parla difficile.
+Tu rispondi normale.</a:t>
             </a:r>
           </a:p>
         </p:txBody>
@@ -4338,8 +4338,8 @@
                 </a:solidFill>
                 <a:latin typeface="Graphik"/>
               </a:rPr>
-              <a:t>Il modulo non è difficile.
-È scritto in una lingua che non è la tua.</a:t>
+              <a:t>Il modulo non chiede cose difficili.
+Le chiede in modo difficile.</a:t>
             </a:r>
           </a:p>
         </p:txBody>
@@ -4569,7 +4569,7 @@
         <p:spPr>
           <a:xfrm>
             <a:off x="868680" y="4572000"/>
-            <a:ext cx="3108960" cy="365760"/>
+            <a:ext cx="3108960" cy="502920"/>
           </a:xfrm>
           <a:prstGeom prst="rect">
             <a:avLst/>
@@ -4584,7 +4584,7 @@
           <a:p>
             <a:pPr algn="l">
               <a:lnSpc>
-                <a:spcPct val="100000"/>
+                <a:spcPct val="115000"/>
               </a:lnSpc>
               <a:spcAft>
                 <a:spcPts val="0"/>
@@ -4597,7 +4597,7 @@
                 </a:solidFill>
                 <a:latin typeface="Graphik"/>
               </a:rPr>
-              <a:t>Si ferma prima di iniziare</a:t>
+              <a:t>Non dice cosa sta chiedendo</a:t>
             </a:r>
           </a:p>
         </p:txBody>
@@ -4610,7 +4610,7 @@
         </p:nvSpPr>
         <p:spPr>
           <a:xfrm>
-            <a:off x="868680" y="5047488"/>
+            <a:off x="868680" y="5166360"/>
             <a:ext cx="3108960" cy="914400"/>
           </a:xfrm>
           <a:prstGeom prst="rect">
@@ -4639,7 +4639,7 @@
                 </a:solidFill>
                 <a:latin typeface="Graphik"/>
               </a:rPr>
-              <a:t>Non sa quale informazione le stia chiedendo, né come scriverla.</a:t>
+              <a:t>L'etichetta cita una norma. L'informazione che serve davvero non compare.</a:t>
             </a:r>
           </a:p>
         </p:txBody>
@@ -4697,7 +4697,7 @@
         <p:spPr>
           <a:xfrm>
             <a:off x="4462272" y="4572000"/>
-            <a:ext cx="3108960" cy="365760"/>
+            <a:ext cx="3108960" cy="502920"/>
           </a:xfrm>
           <a:prstGeom prst="rect">
             <a:avLst/>
@@ -4712,7 +4712,7 @@
           <a:p>
             <a:pPr algn="l">
               <a:lnSpc>
-                <a:spcPct val="100000"/>
+                <a:spcPct val="115000"/>
               </a:lnSpc>
               <a:spcAft>
                 <a:spcPts val="0"/>
@@ -4725,7 +4725,7 @@
                 </a:solidFill>
                 <a:latin typeface="Graphik"/>
               </a:rPr>
-              <a:t>Chiede aiuto a qualcuno</a:t>
+              <a:t>Serve sempre qualcun altro</a:t>
             </a:r>
           </a:p>
         </p:txBody>
@@ -4738,7 +4738,7 @@
         </p:nvSpPr>
         <p:spPr>
           <a:xfrm>
-            <a:off x="4462272" y="5047488"/>
+            <a:off x="4462272" y="5166360"/>
             <a:ext cx="3108960" cy="914400"/>
           </a:xfrm>
           <a:prstGeom prst="rect">
@@ -4767,7 +4767,7 @@
                 </a:solidFill>
                 <a:latin typeface="Graphik"/>
               </a:rPr>
-              <a:t>Un figlio, un patronato, un CAF. Ogni volta perde autonomia.</a:t>
+              <a:t>Un figlio, un patronato, un CAF. Per una cosa che riguarda solo te.</a:t>
             </a:r>
           </a:p>
         </p:txBody>
@@ -4825,7 +4825,7 @@
         <p:spPr>
           <a:xfrm>
             <a:off x="8055864" y="4572000"/>
-            <a:ext cx="3108960" cy="365760"/>
+            <a:ext cx="3108960" cy="502920"/>
           </a:xfrm>
           <a:prstGeom prst="rect">
             <a:avLst/>
@@ -4840,7 +4840,7 @@
           <a:p>
             <a:pPr algn="l">
               <a:lnSpc>
-                <a:spcPct val="100000"/>
+                <a:spcPct val="115000"/>
               </a:lnSpc>
               <a:spcAft>
                 <a:spcPts val="0"/>
@@ -4866,7 +4866,7 @@
         </p:nvSpPr>
         <p:spPr>
           <a:xfrm>
-            <a:off x="8055864" y="5047488"/>
+            <a:off x="8055864" y="5166360"/>
             <a:ext cx="3108960" cy="914400"/>
           </a:xfrm>
           <a:prstGeom prst="rect">
@@ -4895,7 +4895,7 @@
                 </a:solidFill>
                 <a:latin typeface="Graphik"/>
               </a:rPr>
-              <a:t>E con lui la pratica: la residenza, il contributo, il diritto.</a:t>
+              <a:t>Con lui la pratica: la residenza, il contributo, il diritto.</a:t>
             </a:r>
           </a:p>
         </p:txBody>
@@ -5065,8 +5065,8 @@
                 </a:solidFill>
                 <a:latin typeface="Graphik"/>
               </a:rPr>
-              <a:t>Una domanda alla volta,
-in italiano semplice.</a:t>
+              <a:t>Te lo chiediamo noi,
+una domanda alla volta.</a:t>
             </a:r>
           </a:p>
         </p:txBody>
